--- a/report/AI-in-CAD-Major-Project-Presentation.pptx
+++ b/report/AI-in-CAD-Major-Project-Presentation.pptx
@@ -28,6 +28,9 @@
     <p:sldId id="276" r:id="rId27"/>
     <p:sldId id="277" r:id="rId28"/>
     <p:sldId id="278" r:id="rId29"/>
+    <p:sldId id="279" r:id="rId30"/>
+    <p:sldId id="280" r:id="rId31"/>
+    <p:sldId id="281" r:id="rId32"/>
   </p:sldIdLst>
   <p:sldSz cx="12191695" cy="6858000" type="screen4x3"/>
   <p:notesSz cx="6858000" cy="9144000"/>
@@ -3743,6 +3746,132 @@
       <p:pic>
         <p:nvPicPr>
           <p:cNvPr id="2" name="Picture 1" descr="s-23.png"/>
+          <p:cNvPicPr>
+            <a:picLocks noChangeAspect="1"/>
+          </p:cNvPicPr>
+          <p:nvPr/>
+        </p:nvPicPr>
+        <p:blipFill>
+          <a:blip r:embed="rId2"/>
+          <a:stretch>
+            <a:fillRect/>
+          </a:stretch>
+        </p:blipFill>
+        <p:spPr>
+          <a:xfrm>
+            <a:off x="0" y="0"/>
+            <a:ext cx="12191695" cy="6858000"/>
+          </a:xfrm>
+          <a:prstGeom prst="rect">
+            <a:avLst/>
+          </a:prstGeom>
+        </p:spPr>
+      </p:pic>
+    </p:spTree>
+  </p:cSld>
+  <p:clrMapOvr>
+    <a:masterClrMapping/>
+  </p:clrMapOvr>
+</p:sld>
+</file>
+
+<file path=ppt/slides/slide24.xml><?xml version="1.0" encoding="utf-8"?>
+<p:sld xmlns:a="http://schemas.openxmlformats.org/drawingml/2006/main" xmlns:p="http://schemas.openxmlformats.org/presentationml/2006/main" xmlns:r="http://schemas.openxmlformats.org/officeDocument/2006/relationships">
+  <p:cSld>
+    <p:spTree>
+      <p:nvGrpSpPr>
+        <p:cNvPr id="1" name=""/>
+        <p:cNvGrpSpPr/>
+        <p:nvPr/>
+      </p:nvGrpSpPr>
+      <p:grpSpPr/>
+      <p:pic>
+        <p:nvPicPr>
+          <p:cNvPr id="2" name="Picture 1" descr="s-24.png"/>
+          <p:cNvPicPr>
+            <a:picLocks noChangeAspect="1"/>
+          </p:cNvPicPr>
+          <p:nvPr/>
+        </p:nvPicPr>
+        <p:blipFill>
+          <a:blip r:embed="rId2"/>
+          <a:stretch>
+            <a:fillRect/>
+          </a:stretch>
+        </p:blipFill>
+        <p:spPr>
+          <a:xfrm>
+            <a:off x="0" y="0"/>
+            <a:ext cx="12191695" cy="6858000"/>
+          </a:xfrm>
+          <a:prstGeom prst="rect">
+            <a:avLst/>
+          </a:prstGeom>
+        </p:spPr>
+      </p:pic>
+    </p:spTree>
+  </p:cSld>
+  <p:clrMapOvr>
+    <a:masterClrMapping/>
+  </p:clrMapOvr>
+</p:sld>
+</file>
+
+<file path=ppt/slides/slide25.xml><?xml version="1.0" encoding="utf-8"?>
+<p:sld xmlns:a="http://schemas.openxmlformats.org/drawingml/2006/main" xmlns:p="http://schemas.openxmlformats.org/presentationml/2006/main" xmlns:r="http://schemas.openxmlformats.org/officeDocument/2006/relationships">
+  <p:cSld>
+    <p:spTree>
+      <p:nvGrpSpPr>
+        <p:cNvPr id="1" name=""/>
+        <p:cNvGrpSpPr/>
+        <p:nvPr/>
+      </p:nvGrpSpPr>
+      <p:grpSpPr/>
+      <p:pic>
+        <p:nvPicPr>
+          <p:cNvPr id="2" name="Picture 1" descr="s-25.png"/>
+          <p:cNvPicPr>
+            <a:picLocks noChangeAspect="1"/>
+          </p:cNvPicPr>
+          <p:nvPr/>
+        </p:nvPicPr>
+        <p:blipFill>
+          <a:blip r:embed="rId2"/>
+          <a:stretch>
+            <a:fillRect/>
+          </a:stretch>
+        </p:blipFill>
+        <p:spPr>
+          <a:xfrm>
+            <a:off x="0" y="0"/>
+            <a:ext cx="12191695" cy="6858000"/>
+          </a:xfrm>
+          <a:prstGeom prst="rect">
+            <a:avLst/>
+          </a:prstGeom>
+        </p:spPr>
+      </p:pic>
+    </p:spTree>
+  </p:cSld>
+  <p:clrMapOvr>
+    <a:masterClrMapping/>
+  </p:clrMapOvr>
+</p:sld>
+</file>
+
+<file path=ppt/slides/slide26.xml><?xml version="1.0" encoding="utf-8"?>
+<p:sld xmlns:a="http://schemas.openxmlformats.org/drawingml/2006/main" xmlns:p="http://schemas.openxmlformats.org/presentationml/2006/main" xmlns:r="http://schemas.openxmlformats.org/officeDocument/2006/relationships">
+  <p:cSld>
+    <p:spTree>
+      <p:nvGrpSpPr>
+        <p:cNvPr id="1" name=""/>
+        <p:cNvGrpSpPr/>
+        <p:nvPr/>
+      </p:nvGrpSpPr>
+      <p:grpSpPr/>
+      <p:pic>
+        <p:nvPicPr>
+          <p:cNvPr id="2" name="Picture 1" descr="s-26.png"/>
           <p:cNvPicPr>
             <a:picLocks noChangeAspect="1"/>
           </p:cNvPicPr>

--- a/report/AI-in-CAD-Major-Project-Presentation.pptx
+++ b/report/AI-in-CAD-Major-Project-Presentation.pptx
@@ -6,31 +6,31 @@
   </p:sldMasterIdLst>
   <p:sldIdLst>
     <p:sldId id="256" r:id="rId7"/>
-    <p:sldId id="257" r:id="rId8"/>
-    <p:sldId id="258" r:id="rId9"/>
-    <p:sldId id="259" r:id="rId10"/>
-    <p:sldId id="260" r:id="rId11"/>
-    <p:sldId id="261" r:id="rId12"/>
-    <p:sldId id="262" r:id="rId13"/>
-    <p:sldId id="263" r:id="rId14"/>
-    <p:sldId id="264" r:id="rId15"/>
-    <p:sldId id="265" r:id="rId16"/>
-    <p:sldId id="266" r:id="rId17"/>
-    <p:sldId id="267" r:id="rId18"/>
-    <p:sldId id="268" r:id="rId19"/>
-    <p:sldId id="269" r:id="rId20"/>
-    <p:sldId id="270" r:id="rId21"/>
-    <p:sldId id="271" r:id="rId22"/>
-    <p:sldId id="272" r:id="rId23"/>
-    <p:sldId id="273" r:id="rId24"/>
-    <p:sldId id="274" r:id="rId25"/>
-    <p:sldId id="275" r:id="rId26"/>
-    <p:sldId id="276" r:id="rId27"/>
-    <p:sldId id="277" r:id="rId28"/>
-    <p:sldId id="278" r:id="rId29"/>
-    <p:sldId id="279" r:id="rId30"/>
-    <p:sldId id="280" r:id="rId31"/>
-    <p:sldId id="281" r:id="rId32"/>
+    <p:sldId id="257" r:id="rId9"/>
+    <p:sldId id="258" r:id="rId10"/>
+    <p:sldId id="259" r:id="rId11"/>
+    <p:sldId id="260" r:id="rId12"/>
+    <p:sldId id="261" r:id="rId13"/>
+    <p:sldId id="262" r:id="rId14"/>
+    <p:sldId id="263" r:id="rId15"/>
+    <p:sldId id="264" r:id="rId16"/>
+    <p:sldId id="265" r:id="rId17"/>
+    <p:sldId id="266" r:id="rId18"/>
+    <p:sldId id="267" r:id="rId19"/>
+    <p:sldId id="268" r:id="rId20"/>
+    <p:sldId id="269" r:id="rId21"/>
+    <p:sldId id="270" r:id="rId22"/>
+    <p:sldId id="271" r:id="rId23"/>
+    <p:sldId id="272" r:id="rId24"/>
+    <p:sldId id="273" r:id="rId25"/>
+    <p:sldId id="274" r:id="rId26"/>
+    <p:sldId id="275" r:id="rId27"/>
+    <p:sldId id="276" r:id="rId28"/>
+    <p:sldId id="277" r:id="rId29"/>
+    <p:sldId id="278" r:id="rId30"/>
+    <p:sldId id="279" r:id="rId31"/>
+    <p:sldId id="280" r:id="rId32"/>
+    <p:sldId id="281" r:id="rId33"/>
   </p:sldIdLst>
   <p:sldSz cx="12191695" cy="6858000" type="screen4x3"/>
   <p:notesSz cx="6858000" cy="9144000"/>
@@ -130,6 +130,2866 @@
     </a:lvl9pPr>
   </p:defaultTextStyle>
 </p:presentation>
+</file>
+
+<file path=ppt/notesMasters/notesMaster1.xml><?xml version="1.0" encoding="utf-8"?>
+<p:notesMaster xmlns:a="http://schemas.openxmlformats.org/drawingml/2006/main" xmlns:p="http://schemas.openxmlformats.org/presentationml/2006/main" xmlns:r="http://schemas.openxmlformats.org/officeDocument/2006/relationships">
+  <p:cSld>
+    <p:bg>
+      <p:bgRef idx="1001">
+        <a:schemeClr val="bg1"/>
+      </p:bgRef>
+    </p:bg>
+    <p:spTree>
+      <p:nvGrpSpPr>
+        <p:cNvPr id="1" name=""/>
+        <p:cNvGrpSpPr/>
+        <p:nvPr/>
+      </p:nvGrpSpPr>
+      <p:grpSpPr>
+        <a:xfrm>
+          <a:off x="0" y="0"/>
+          <a:ext cx="0" cy="0"/>
+          <a:chOff x="0" y="0"/>
+          <a:chExt cx="0" cy="0"/>
+        </a:xfrm>
+      </p:grpSpPr>
+      <p:sp>
+        <p:nvSpPr>
+          <p:cNvPr id="2" name="Header Placeholder 1"/>
+          <p:cNvSpPr>
+            <a:spLocks noGrp="1"/>
+          </p:cNvSpPr>
+          <p:nvPr>
+            <p:ph type="hdr" sz="quarter"/>
+          </p:nvPr>
+        </p:nvSpPr>
+        <p:spPr>
+          <a:xfrm>
+            <a:off x="0" y="0"/>
+            <a:ext cx="2971800" cy="457200"/>
+          </a:xfrm>
+          <a:prstGeom prst="rect">
+            <a:avLst/>
+          </a:prstGeom>
+        </p:spPr>
+        <p:txBody>
+          <a:bodyPr vert="horz" lIns="91440" tIns="45720" rIns="91440" bIns="45720" rtlCol="0"/>
+          <a:lstStyle>
+            <a:lvl1pPr algn="l">
+              <a:defRPr sz="1200"/>
+            </a:lvl1pPr>
+          </a:lstStyle>
+          <a:p>
+            <a:endParaRPr lang="en-US"/>
+          </a:p>
+        </p:txBody>
+      </p:sp>
+      <p:sp>
+        <p:nvSpPr>
+          <p:cNvPr id="3" name="Date Placeholder 2"/>
+          <p:cNvSpPr>
+            <a:spLocks noGrp="1"/>
+          </p:cNvSpPr>
+          <p:nvPr>
+            <p:ph type="dt" idx="1"/>
+          </p:nvPr>
+        </p:nvSpPr>
+        <p:spPr>
+          <a:xfrm>
+            <a:off x="3884613" y="0"/>
+            <a:ext cx="2971800" cy="457200"/>
+          </a:xfrm>
+          <a:prstGeom prst="rect">
+            <a:avLst/>
+          </a:prstGeom>
+        </p:spPr>
+        <p:txBody>
+          <a:bodyPr vert="horz" lIns="91440" tIns="45720" rIns="91440" bIns="45720" rtlCol="0"/>
+          <a:lstStyle>
+            <a:lvl1pPr algn="r">
+              <a:defRPr sz="1200"/>
+            </a:lvl1pPr>
+          </a:lstStyle>
+          <a:p>
+            <a:fld id="{0F89C1C7-3DCD-1040-A9CF-14679D8B5DDD}" type="datetimeFigureOut">
+              <a:rPr lang="en-US" smtClean="0"/>
+              <a:t>10/17/16</a:t>
+            </a:fld>
+            <a:endParaRPr lang="en-US"/>
+          </a:p>
+        </p:txBody>
+      </p:sp>
+      <p:sp>
+        <p:nvSpPr>
+          <p:cNvPr id="4" name="Slide Image Placeholder 3"/>
+          <p:cNvSpPr>
+            <a:spLocks noGrp="1" noRot="1" noChangeAspect="1"/>
+          </p:cNvSpPr>
+          <p:nvPr>
+            <p:ph type="sldImg" idx="2"/>
+          </p:nvPr>
+        </p:nvSpPr>
+        <p:spPr>
+          <a:xfrm>
+            <a:off x="1143000" y="685800"/>
+            <a:ext cx="4572000" cy="3429000"/>
+          </a:xfrm>
+          <a:prstGeom prst="rect">
+            <a:avLst/>
+          </a:prstGeom>
+          <a:noFill/>
+          <a:ln w="12700">
+            <a:solidFill>
+              <a:prstClr val="black"/>
+            </a:solidFill>
+          </a:ln>
+        </p:spPr>
+        <p:txBody>
+          <a:bodyPr vert="horz" lIns="91440" tIns="45720" rIns="91440" bIns="45720" rtlCol="0" anchor="ctr"/>
+          <a:lstStyle/>
+          <a:p>
+            <a:endParaRPr lang="en-US"/>
+          </a:p>
+        </p:txBody>
+      </p:sp>
+      <p:sp>
+        <p:nvSpPr>
+          <p:cNvPr id="5" name="Notes Placeholder 4"/>
+          <p:cNvSpPr>
+            <a:spLocks noGrp="1"/>
+          </p:cNvSpPr>
+          <p:nvPr>
+            <p:ph type="body" sz="quarter" idx="3"/>
+          </p:nvPr>
+        </p:nvSpPr>
+        <p:spPr>
+          <a:xfrm>
+            <a:off x="685800" y="4343400"/>
+            <a:ext cx="5486400" cy="4114800"/>
+          </a:xfrm>
+          <a:prstGeom prst="rect">
+            <a:avLst/>
+          </a:prstGeom>
+        </p:spPr>
+        <p:txBody>
+          <a:bodyPr vert="horz" lIns="91440" tIns="45720" rIns="91440" bIns="45720" rtlCol="0"/>
+          <a:lstStyle/>
+          <a:p>
+            <a:pPr lvl="0"/>
+            <a:r>
+              <a:rPr lang="en-US" smtClean="0"/>
+              <a:t>Click to edit Master text styles</a:t>
+            </a:r>
+          </a:p>
+          <a:p>
+            <a:pPr lvl="1"/>
+            <a:r>
+              <a:rPr lang="en-US" smtClean="0"/>
+              <a:t>Second level</a:t>
+            </a:r>
+          </a:p>
+          <a:p>
+            <a:pPr lvl="2"/>
+            <a:r>
+              <a:rPr lang="en-US" smtClean="0"/>
+              <a:t>Third level</a:t>
+            </a:r>
+          </a:p>
+          <a:p>
+            <a:pPr lvl="3"/>
+            <a:r>
+              <a:rPr lang="en-US" smtClean="0"/>
+              <a:t>Fourth level</a:t>
+            </a:r>
+          </a:p>
+          <a:p>
+            <a:pPr lvl="4"/>
+            <a:r>
+              <a:rPr lang="en-US" smtClean="0"/>
+              <a:t>Fifth level</a:t>
+            </a:r>
+            <a:endParaRPr lang="en-US"/>
+          </a:p>
+        </p:txBody>
+      </p:sp>
+      <p:sp>
+        <p:nvSpPr>
+          <p:cNvPr id="6" name="Footer Placeholder 5"/>
+          <p:cNvSpPr>
+            <a:spLocks noGrp="1"/>
+          </p:cNvSpPr>
+          <p:nvPr>
+            <p:ph type="ftr" sz="quarter" idx="4"/>
+          </p:nvPr>
+        </p:nvSpPr>
+        <p:spPr>
+          <a:xfrm>
+            <a:off x="0" y="8685213"/>
+            <a:ext cx="2971800" cy="457200"/>
+          </a:xfrm>
+          <a:prstGeom prst="rect">
+            <a:avLst/>
+          </a:prstGeom>
+        </p:spPr>
+        <p:txBody>
+          <a:bodyPr vert="horz" lIns="91440" tIns="45720" rIns="91440" bIns="45720" rtlCol="0" anchor="b"/>
+          <a:lstStyle>
+            <a:lvl1pPr algn="l">
+              <a:defRPr sz="1200"/>
+            </a:lvl1pPr>
+          </a:lstStyle>
+          <a:p>
+            <a:endParaRPr lang="en-US"/>
+          </a:p>
+        </p:txBody>
+      </p:sp>
+      <p:sp>
+        <p:nvSpPr>
+          <p:cNvPr id="7" name="Slide Number Placeholder 6"/>
+          <p:cNvSpPr>
+            <a:spLocks noGrp="1"/>
+          </p:cNvSpPr>
+          <p:nvPr>
+            <p:ph type="sldNum" sz="quarter" idx="5"/>
+          </p:nvPr>
+        </p:nvSpPr>
+        <p:spPr>
+          <a:xfrm>
+            <a:off x="3884613" y="8685213"/>
+            <a:ext cx="2971800" cy="457200"/>
+          </a:xfrm>
+          <a:prstGeom prst="rect">
+            <a:avLst/>
+          </a:prstGeom>
+        </p:spPr>
+        <p:txBody>
+          <a:bodyPr vert="horz" lIns="91440" tIns="45720" rIns="91440" bIns="45720" rtlCol="0" anchor="b"/>
+          <a:lstStyle>
+            <a:lvl1pPr algn="r">
+              <a:defRPr sz="1200"/>
+            </a:lvl1pPr>
+          </a:lstStyle>
+          <a:p>
+            <a:fld id="{BB5E49A5-4136-284D-997B-48E1D791AD67}" type="slidenum">
+              <a:rPr lang="en-US" smtClean="0"/>
+              <a:t>‹#›</a:t>
+            </a:fld>
+            <a:endParaRPr lang="en-US"/>
+          </a:p>
+        </p:txBody>
+      </p:sp>
+    </p:spTree>
+    <p:extLst>
+      <p:ext uri="{BB962C8B-B14F-4D97-AF65-F5344CB8AC3E}">
+        <p14:creationId xmlns:p14="http://schemas.microsoft.com/office/powerpoint/2010/main" val="2623252185"/>
+      </p:ext>
+    </p:extLst>
+  </p:cSld>
+  <p:clrMap bg1="lt1" tx1="dk1" bg2="lt2" tx2="dk2" accent1="accent1" accent2="accent2" accent3="accent3" accent4="accent4" accent5="accent5" accent6="accent6" hlink="hlink" folHlink="folHlink"/>
+  <p:notesStyle>
+    <a:lvl1pPr marL="0" algn="l" defTabSz="457200" rtl="0" eaLnBrk="1" latinLnBrk="0" hangingPunct="1">
+      <a:defRPr sz="1200" kern="1200">
+        <a:solidFill>
+          <a:schemeClr val="tx1"/>
+        </a:solidFill>
+        <a:latin typeface="+mn-lt"/>
+        <a:ea typeface="+mn-ea"/>
+        <a:cs typeface="+mn-cs"/>
+      </a:defRPr>
+    </a:lvl1pPr>
+    <a:lvl2pPr marL="457200" algn="l" defTabSz="457200" rtl="0" eaLnBrk="1" latinLnBrk="0" hangingPunct="1">
+      <a:defRPr sz="1200" kern="1200">
+        <a:solidFill>
+          <a:schemeClr val="tx1"/>
+        </a:solidFill>
+        <a:latin typeface="+mn-lt"/>
+        <a:ea typeface="+mn-ea"/>
+        <a:cs typeface="+mn-cs"/>
+      </a:defRPr>
+    </a:lvl2pPr>
+    <a:lvl3pPr marL="914400" algn="l" defTabSz="457200" rtl="0" eaLnBrk="1" latinLnBrk="0" hangingPunct="1">
+      <a:defRPr sz="1200" kern="1200">
+        <a:solidFill>
+          <a:schemeClr val="tx1"/>
+        </a:solidFill>
+        <a:latin typeface="+mn-lt"/>
+        <a:ea typeface="+mn-ea"/>
+        <a:cs typeface="+mn-cs"/>
+      </a:defRPr>
+    </a:lvl3pPr>
+    <a:lvl4pPr marL="1371600" algn="l" defTabSz="457200" rtl="0" eaLnBrk="1" latinLnBrk="0" hangingPunct="1">
+      <a:defRPr sz="1200" kern="1200">
+        <a:solidFill>
+          <a:schemeClr val="tx1"/>
+        </a:solidFill>
+        <a:latin typeface="+mn-lt"/>
+        <a:ea typeface="+mn-ea"/>
+        <a:cs typeface="+mn-cs"/>
+      </a:defRPr>
+    </a:lvl4pPr>
+    <a:lvl5pPr marL="1828800" algn="l" defTabSz="457200" rtl="0" eaLnBrk="1" latinLnBrk="0" hangingPunct="1">
+      <a:defRPr sz="1200" kern="1200">
+        <a:solidFill>
+          <a:schemeClr val="tx1"/>
+        </a:solidFill>
+        <a:latin typeface="+mn-lt"/>
+        <a:ea typeface="+mn-ea"/>
+        <a:cs typeface="+mn-cs"/>
+      </a:defRPr>
+    </a:lvl5pPr>
+    <a:lvl6pPr marL="2286000" algn="l" defTabSz="457200" rtl="0" eaLnBrk="1" latinLnBrk="0" hangingPunct="1">
+      <a:defRPr sz="1200" kern="1200">
+        <a:solidFill>
+          <a:schemeClr val="tx1"/>
+        </a:solidFill>
+        <a:latin typeface="+mn-lt"/>
+        <a:ea typeface="+mn-ea"/>
+        <a:cs typeface="+mn-cs"/>
+      </a:defRPr>
+    </a:lvl6pPr>
+    <a:lvl7pPr marL="2743200" algn="l" defTabSz="457200" rtl="0" eaLnBrk="1" latinLnBrk="0" hangingPunct="1">
+      <a:defRPr sz="1200" kern="1200">
+        <a:solidFill>
+          <a:schemeClr val="tx1"/>
+        </a:solidFill>
+        <a:latin typeface="+mn-lt"/>
+        <a:ea typeface="+mn-ea"/>
+        <a:cs typeface="+mn-cs"/>
+      </a:defRPr>
+    </a:lvl7pPr>
+    <a:lvl8pPr marL="3200400" algn="l" defTabSz="457200" rtl="0" eaLnBrk="1" latinLnBrk="0" hangingPunct="1">
+      <a:defRPr sz="1200" kern="1200">
+        <a:solidFill>
+          <a:schemeClr val="tx1"/>
+        </a:solidFill>
+        <a:latin typeface="+mn-lt"/>
+        <a:ea typeface="+mn-ea"/>
+        <a:cs typeface="+mn-cs"/>
+      </a:defRPr>
+    </a:lvl8pPr>
+    <a:lvl9pPr marL="3657600" algn="l" defTabSz="457200" rtl="0" eaLnBrk="1" latinLnBrk="0" hangingPunct="1">
+      <a:defRPr sz="1200" kern="1200">
+        <a:solidFill>
+          <a:schemeClr val="tx1"/>
+        </a:solidFill>
+        <a:latin typeface="+mn-lt"/>
+        <a:ea typeface="+mn-ea"/>
+        <a:cs typeface="+mn-cs"/>
+      </a:defRPr>
+    </a:lvl9pPr>
+  </p:notesStyle>
+</p:notesMaster>
+</file>
+
+<file path=ppt/notesSlides/notesSlide1.xml><?xml version="1.0" encoding="utf-8"?>
+<p:notes xmlns:a="http://schemas.openxmlformats.org/drawingml/2006/main" xmlns:p="http://schemas.openxmlformats.org/presentationml/2006/main" xmlns:r="http://schemas.openxmlformats.org/officeDocument/2006/relationships">
+  <p:cSld>
+    <p:spTree>
+      <p:nvGrpSpPr>
+        <p:cNvPr id="1" name=""/>
+        <p:cNvGrpSpPr/>
+        <p:nvPr/>
+      </p:nvGrpSpPr>
+      <p:grpSpPr>
+        <a:xfrm>
+          <a:off x="0" y="0"/>
+          <a:ext cx="0" cy="0"/>
+          <a:chOff x="0" y="0"/>
+          <a:chExt cx="0" cy="0"/>
+        </a:xfrm>
+      </p:grpSpPr>
+      <p:sp>
+        <p:nvSpPr>
+          <p:cNvPr id="2" name="Slide Image Placeholder 1"/>
+          <p:cNvSpPr>
+            <a:spLocks noGrp="1"/>
+          </p:cNvSpPr>
+          <p:nvPr>
+            <p:ph type="sldImg" idx="2"/>
+          </p:nvPr>
+        </p:nvSpPr>
+        <p:spPr/>
+      </p:sp>
+      <p:sp>
+        <p:nvSpPr>
+          <p:cNvPr id="3" name="Notes Placeholder 2"/>
+          <p:cNvSpPr>
+            <a:spLocks noGrp="1"/>
+          </p:cNvSpPr>
+          <p:nvPr>
+            <p:ph type="body" idx="3" sz="quarter"/>
+          </p:nvPr>
+        </p:nvSpPr>
+        <p:spPr/>
+        <p:txBody>
+          <a:bodyPr/>
+          <a:lstStyle/>
+          <a:p>
+            <a:r>
+              <a:t>ANSH.</a:t>
+            </a:r>
+          </a:p>
+          <a:p>
+            <a:r>
+              <a:t>Good morning. Our major project is the Strategic Application of Artificial Intelligence in CAD.</a:t>
+            </a:r>
+          </a:p>
+          <a:p>
+            <a:r>
+              <a:t>We are five: Ankur, myself, Atishay, Bhavya and Dharmendra, guided by Dr. Rawal.</a:t>
+            </a:r>
+          </a:p>
+          <a:p>
+            <a:r>
+              <a:t>In one line: you type a sentence like "knuckle joint for 50 kN", and the software designs that</a:t>
+            </a:r>
+          </a:p>
+          <a:p>
+            <a:r>
+              <a:t>joint completely, checks every way it can break, builds the 3D parts and draws the sheet. It</a:t>
+            </a:r>
+          </a:p>
+          <a:p>
+            <a:r>
+              <a:t>takes about ten seconds.</a:t>
+            </a:r>
+          </a:p>
+          <a:p>
+            <a:r>
+              <a:t>I will cover the problem and the literature. Bhavya takes what we built, Atishay the worked</a:t>
+            </a:r>
+          </a:p>
+          <a:p>
+            <a:r>
+              <a:t>example and the output, Dharmendra the verification, Ankur the validation.</a:t>
+            </a:r>
+          </a:p>
+        </p:txBody>
+      </p:sp>
+      <p:sp>
+        <p:nvSpPr>
+          <p:cNvPr id="4" name="Slide Number Placeholder 3"/>
+          <p:cNvSpPr>
+            <a:spLocks noGrp="1"/>
+          </p:cNvSpPr>
+          <p:nvPr>
+            <p:ph type="sldNum" idx="5" sz="quarter"/>
+          </p:nvPr>
+        </p:nvSpPr>
+        <p:spPr/>
+      </p:sp>
+    </p:spTree>
+  </p:cSld>
+  <p:clrMapOvr>
+    <a:masterClrMapping/>
+  </p:clrMapOvr>
+</p:notes>
+</file>
+
+<file path=ppt/notesSlides/notesSlide10.xml><?xml version="1.0" encoding="utf-8"?>
+<p:notes xmlns:a="http://schemas.openxmlformats.org/drawingml/2006/main" xmlns:p="http://schemas.openxmlformats.org/presentationml/2006/main" xmlns:r="http://schemas.openxmlformats.org/officeDocument/2006/relationships">
+  <p:cSld>
+    <p:spTree>
+      <p:nvGrpSpPr>
+        <p:cNvPr id="1" name=""/>
+        <p:cNvGrpSpPr/>
+        <p:nvPr/>
+      </p:nvGrpSpPr>
+      <p:grpSpPr>
+        <a:xfrm>
+          <a:off x="0" y="0"/>
+          <a:ext cx="0" cy="0"/>
+          <a:chOff x="0" y="0"/>
+          <a:chExt cx="0" cy="0"/>
+        </a:xfrm>
+      </p:grpSpPr>
+      <p:sp>
+        <p:nvSpPr>
+          <p:cNvPr id="2" name="Slide Image Placeholder 1"/>
+          <p:cNvSpPr>
+            <a:spLocks noGrp="1"/>
+          </p:cNvSpPr>
+          <p:nvPr>
+            <p:ph type="sldImg" idx="2"/>
+          </p:nvPr>
+        </p:nvSpPr>
+        <p:spPr/>
+      </p:sp>
+      <p:sp>
+        <p:nvSpPr>
+          <p:cNvPr id="3" name="Notes Placeholder 2"/>
+          <p:cNvSpPr>
+            <a:spLocks noGrp="1"/>
+          </p:cNvSpPr>
+          <p:nvPr>
+            <p:ph type="body" idx="3" sz="quarter"/>
+          </p:nvPr>
+        </p:nvSpPr>
+        <p:spPr/>
+        <p:txBody>
+          <a:bodyPr/>
+          <a:lstStyle/>
+          <a:p>
+            <a:r>
+              <a:t>BHAVYA.</a:t>
+            </a:r>
+          </a:p>
+          <a:p>
+            <a:r>
+              <a:t>Six joints, 44 failure checks in total, and every check is satisfied.</a:t>
+            </a:r>
+          </a:p>
+          <a:p>
+            <a:r>
+              <a:t>The busiest check across all six sits between 67 and 79 percent of allowable. That is</a:t>
+            </a:r>
+          </a:p>
+          <a:p>
+            <a:r>
+              <a:t>deliberate, not luck: each joint is sized for 1.25 times the load you asked for, then the</a:t>
+            </a:r>
+          </a:p>
+          <a:p>
+            <a:r>
+              <a:t>stresses are reported at the real load. Margin stays in hand rather than being spent on paper.</a:t>
+            </a:r>
+          </a:p>
+          <a:p>
+            <a:r>
+              <a:t>The gib and cotter joint needed a decision. Unwin gives the breadth and thickness but no strap</a:t>
+            </a:r>
+          </a:p>
+          <a:p>
+            <a:r>
+              <a:t>proportions. Rather than borrow a ratio from elsewhere or invent one, every dimension the source</a:t>
+            </a:r>
+          </a:p>
+          <a:p>
+            <a:r>
+              <a:t>does not give is sized against a failure check until it passes.</a:t>
+            </a:r>
+          </a:p>
+        </p:txBody>
+      </p:sp>
+      <p:sp>
+        <p:nvSpPr>
+          <p:cNvPr id="4" name="Slide Number Placeholder 3"/>
+          <p:cNvSpPr>
+            <a:spLocks noGrp="1"/>
+          </p:cNvSpPr>
+          <p:nvPr>
+            <p:ph type="sldNum" idx="5" sz="quarter"/>
+          </p:nvPr>
+        </p:nvSpPr>
+        <p:spPr/>
+      </p:sp>
+    </p:spTree>
+  </p:cSld>
+  <p:clrMapOvr>
+    <a:masterClrMapping/>
+  </p:clrMapOvr>
+</p:notes>
+</file>
+
+<file path=ppt/notesSlides/notesSlide11.xml><?xml version="1.0" encoding="utf-8"?>
+<p:notes xmlns:a="http://schemas.openxmlformats.org/drawingml/2006/main" xmlns:p="http://schemas.openxmlformats.org/presentationml/2006/main" xmlns:r="http://schemas.openxmlformats.org/officeDocument/2006/relationships">
+  <p:cSld>
+    <p:spTree>
+      <p:nvGrpSpPr>
+        <p:cNvPr id="1" name=""/>
+        <p:cNvGrpSpPr/>
+        <p:nvPr/>
+      </p:nvGrpSpPr>
+      <p:grpSpPr>
+        <a:xfrm>
+          <a:off x="0" y="0"/>
+          <a:ext cx="0" cy="0"/>
+          <a:chOff x="0" y="0"/>
+          <a:chExt cx="0" cy="0"/>
+        </a:xfrm>
+      </p:grpSpPr>
+      <p:sp>
+        <p:nvSpPr>
+          <p:cNvPr id="2" name="Slide Image Placeholder 1"/>
+          <p:cNvSpPr>
+            <a:spLocks noGrp="1"/>
+          </p:cNvSpPr>
+          <p:nvPr>
+            <p:ph type="sldImg" idx="2"/>
+          </p:nvPr>
+        </p:nvSpPr>
+        <p:spPr/>
+      </p:sp>
+      <p:sp>
+        <p:nvSpPr>
+          <p:cNvPr id="3" name="Notes Placeholder 2"/>
+          <p:cNvSpPr>
+            <a:spLocks noGrp="1"/>
+          </p:cNvSpPr>
+          <p:nvPr>
+            <p:ph type="body" idx="3" sz="quarter"/>
+          </p:nvPr>
+        </p:nvSpPr>
+        <p:spPr/>
+        <p:txBody>
+          <a:bodyPr/>
+          <a:lstStyle/>
+          <a:p>
+            <a:r>
+              <a:t>ATISHAY. Section opener. Say: let me take one joint end to end, with real numbers.</a:t>
+            </a:r>
+          </a:p>
+        </p:txBody>
+      </p:sp>
+      <p:sp>
+        <p:nvSpPr>
+          <p:cNvPr id="4" name="Slide Number Placeholder 3"/>
+          <p:cNvSpPr>
+            <a:spLocks noGrp="1"/>
+          </p:cNvSpPr>
+          <p:nvPr>
+            <p:ph type="sldNum" idx="5" sz="quarter"/>
+          </p:nvPr>
+        </p:nvSpPr>
+        <p:spPr/>
+      </p:sp>
+    </p:spTree>
+  </p:cSld>
+  <p:clrMapOvr>
+    <a:masterClrMapping/>
+  </p:clrMapOvr>
+</p:notes>
+</file>
+
+<file path=ppt/notesSlides/notesSlide12.xml><?xml version="1.0" encoding="utf-8"?>
+<p:notes xmlns:a="http://schemas.openxmlformats.org/drawingml/2006/main" xmlns:p="http://schemas.openxmlformats.org/presentationml/2006/main" xmlns:r="http://schemas.openxmlformats.org/officeDocument/2006/relationships">
+  <p:cSld>
+    <p:spTree>
+      <p:nvGrpSpPr>
+        <p:cNvPr id="1" name=""/>
+        <p:cNvGrpSpPr/>
+        <p:nvPr/>
+      </p:nvGrpSpPr>
+      <p:grpSpPr>
+        <a:xfrm>
+          <a:off x="0" y="0"/>
+          <a:ext cx="0" cy="0"/>
+          <a:chOff x="0" y="0"/>
+          <a:chExt cx="0" cy="0"/>
+        </a:xfrm>
+      </p:grpSpPr>
+      <p:sp>
+        <p:nvSpPr>
+          <p:cNvPr id="2" name="Slide Image Placeholder 1"/>
+          <p:cNvSpPr>
+            <a:spLocks noGrp="1"/>
+          </p:cNvSpPr>
+          <p:nvPr>
+            <p:ph type="sldImg" idx="2"/>
+          </p:nvPr>
+        </p:nvSpPr>
+        <p:spPr/>
+      </p:sp>
+      <p:sp>
+        <p:nvSpPr>
+          <p:cNvPr id="3" name="Notes Placeholder 2"/>
+          <p:cNvSpPr>
+            <a:spLocks noGrp="1"/>
+          </p:cNvSpPr>
+          <p:nvPr>
+            <p:ph type="body" idx="3" sz="quarter"/>
+          </p:nvPr>
+        </p:nvSpPr>
+        <p:spPr/>
+        <p:txBody>
+          <a:bodyPr/>
+          <a:lstStyle/>
+          <a:p>
+            <a:r>
+              <a:t>ATISHAY.</a:t>
+            </a:r>
+          </a:p>
+          <a:p>
+            <a:r>
+              <a:t>Knuckle joint, 50 kN. Three calculations decide everything.</a:t>
+            </a:r>
+          </a:p>
+          <a:p>
+            <a:r>
+              <a:t>Rod from direct tension gives 32.57, so the rod becomes 35, the next standard size.</a:t>
+            </a:r>
+          </a:p>
+          <a:p>
+            <a:r>
+              <a:t>The pin is sized twice. Double shear asks for 25.75. Bending asks for 43.72. We take the larger,</a:t>
+            </a:r>
+          </a:p>
+          <a:p>
+            <a:r>
+              <a:t>so the pin becomes 45.</a:t>
+            </a:r>
+          </a:p>
+          <a:p>
+            <a:r>
+              <a:t>Bending asks for nearly 1.7 times what shear asks for. A pin sized on shear alone would pass its</a:t>
+            </a:r>
+          </a:p>
+          <a:p>
+            <a:r>
+              <a:t>own check and bend in service. The textbook takes the same step.</a:t>
+            </a:r>
+          </a:p>
+          <a:p>
+            <a:r>
+              <a:t>Everything else follows from the rod diameter using the book proportions, each with its source</a:t>
+            </a:r>
+          </a:p>
+          <a:p>
+            <a:r>
+              <a:t>printed beside it.</a:t>
+            </a:r>
+          </a:p>
+        </p:txBody>
+      </p:sp>
+      <p:sp>
+        <p:nvSpPr>
+          <p:cNvPr id="4" name="Slide Number Placeholder 3"/>
+          <p:cNvSpPr>
+            <a:spLocks noGrp="1"/>
+          </p:cNvSpPr>
+          <p:nvPr>
+            <p:ph type="sldNum" idx="5" sz="quarter"/>
+          </p:nvPr>
+        </p:nvSpPr>
+        <p:spPr/>
+      </p:sp>
+    </p:spTree>
+  </p:cSld>
+  <p:clrMapOvr>
+    <a:masterClrMapping/>
+  </p:clrMapOvr>
+</p:notes>
+</file>
+
+<file path=ppt/notesSlides/notesSlide13.xml><?xml version="1.0" encoding="utf-8"?>
+<p:notes xmlns:a="http://schemas.openxmlformats.org/drawingml/2006/main" xmlns:p="http://schemas.openxmlformats.org/presentationml/2006/main" xmlns:r="http://schemas.openxmlformats.org/officeDocument/2006/relationships">
+  <p:cSld>
+    <p:spTree>
+      <p:nvGrpSpPr>
+        <p:cNvPr id="1" name=""/>
+        <p:cNvGrpSpPr/>
+        <p:nvPr/>
+      </p:nvGrpSpPr>
+      <p:grpSpPr>
+        <a:xfrm>
+          <a:off x="0" y="0"/>
+          <a:ext cx="0" cy="0"/>
+          <a:chOff x="0" y="0"/>
+          <a:chExt cx="0" cy="0"/>
+        </a:xfrm>
+      </p:grpSpPr>
+      <p:sp>
+        <p:nvSpPr>
+          <p:cNvPr id="2" name="Slide Image Placeholder 1"/>
+          <p:cNvSpPr>
+            <a:spLocks noGrp="1"/>
+          </p:cNvSpPr>
+          <p:nvPr>
+            <p:ph type="sldImg" idx="2"/>
+          </p:nvPr>
+        </p:nvSpPr>
+        <p:spPr/>
+      </p:sp>
+      <p:sp>
+        <p:nvSpPr>
+          <p:cNvPr id="3" name="Notes Placeholder 2"/>
+          <p:cNvSpPr>
+            <a:spLocks noGrp="1"/>
+          </p:cNvSpPr>
+          <p:nvPr>
+            <p:ph type="body" idx="3" sz="quarter"/>
+          </p:nvPr>
+        </p:nvSpPr>
+        <p:spPr/>
+        <p:txBody>
+          <a:bodyPr/>
+          <a:lstStyle/>
+          <a:p>
+            <a:r>
+              <a:t>ATISHAY.</a:t>
+            </a:r>
+          </a:p>
+          <a:p>
+            <a:r>
+              <a:t>All nine failure modes, evaluated at the real 50 kN, not the design load.</a:t>
+            </a:r>
+          </a:p>
+          <a:p>
+            <a:r>
+              <a:t>Nine of nine are satisfied. The busiest is shear of the eye at 76 percent of its allowable.</a:t>
+            </a:r>
+          </a:p>
+          <a:p>
+            <a:r>
+              <a:t>The point to make: none of this is stored. Ask for 80 kN and every number in this table changes</a:t>
+            </a:r>
+          </a:p>
+          <a:p>
+            <a:r>
+              <a:t>and the pin is re-sized. It is not a library of readymade models.</a:t>
+            </a:r>
+          </a:p>
+        </p:txBody>
+      </p:sp>
+      <p:sp>
+        <p:nvSpPr>
+          <p:cNvPr id="4" name="Slide Number Placeholder 3"/>
+          <p:cNvSpPr>
+            <a:spLocks noGrp="1"/>
+          </p:cNvSpPr>
+          <p:nvPr>
+            <p:ph type="sldNum" idx="5" sz="quarter"/>
+          </p:nvPr>
+        </p:nvSpPr>
+        <p:spPr/>
+      </p:sp>
+    </p:spTree>
+  </p:cSld>
+  <p:clrMapOvr>
+    <a:masterClrMapping/>
+  </p:clrMapOvr>
+</p:notes>
+</file>
+
+<file path=ppt/notesSlides/notesSlide14.xml><?xml version="1.0" encoding="utf-8"?>
+<p:notes xmlns:a="http://schemas.openxmlformats.org/drawingml/2006/main" xmlns:p="http://schemas.openxmlformats.org/presentationml/2006/main" xmlns:r="http://schemas.openxmlformats.org/officeDocument/2006/relationships">
+  <p:cSld>
+    <p:spTree>
+      <p:nvGrpSpPr>
+        <p:cNvPr id="1" name=""/>
+        <p:cNvGrpSpPr/>
+        <p:nvPr/>
+      </p:nvGrpSpPr>
+      <p:grpSpPr>
+        <a:xfrm>
+          <a:off x="0" y="0"/>
+          <a:ext cx="0" cy="0"/>
+          <a:chOff x="0" y="0"/>
+          <a:chExt cx="0" cy="0"/>
+        </a:xfrm>
+      </p:grpSpPr>
+      <p:sp>
+        <p:nvSpPr>
+          <p:cNvPr id="2" name="Slide Image Placeholder 1"/>
+          <p:cNvSpPr>
+            <a:spLocks noGrp="1"/>
+          </p:cNvSpPr>
+          <p:nvPr>
+            <p:ph type="sldImg" idx="2"/>
+          </p:nvPr>
+        </p:nvSpPr>
+        <p:spPr/>
+      </p:sp>
+      <p:sp>
+        <p:nvSpPr>
+          <p:cNvPr id="3" name="Notes Placeholder 2"/>
+          <p:cNvSpPr>
+            <a:spLocks noGrp="1"/>
+          </p:cNvSpPr>
+          <p:nvPr>
+            <p:ph type="body" idx="3" sz="quarter"/>
+          </p:nvPr>
+        </p:nvSpPr>
+        <p:spPr/>
+        <p:txBody>
+          <a:bodyPr/>
+          <a:lstStyle/>
+          <a:p>
+            <a:r>
+              <a:t>ATISHAY.</a:t>
+            </a:r>
+          </a:p>
+          <a:p>
+            <a:r>
+              <a:t>Every run prints its working: the values before rounding, the size adopted, the rule and the</a:t>
+            </a:r>
+          </a:p>
+          <a:p>
+            <a:r>
+              <a:t>source behind each proportion, every check with the numbers substituted, and the mass of each</a:t>
+            </a:r>
+          </a:p>
+          <a:p>
+            <a:r>
+              <a:t>part.</a:t>
+            </a:r>
+          </a:p>
+          <a:p>
+            <a:r>
+              <a:t>Why that matters: a reviewer does not have to trust the result. Any line can be recomputed by</a:t>
+            </a:r>
+          </a:p>
+          <a:p>
+            <a:r>
+              <a:t>hand from the formula printed next to it.</a:t>
+            </a:r>
+          </a:p>
+          <a:p>
+            <a:r>
+              <a:t>It is also the reason the findings later in this deck exist. Printing every check is what made</a:t>
+            </a:r>
+          </a:p>
+          <a:p>
+            <a:r>
+              <a:t>the errors in the books visible.</a:t>
+            </a:r>
+          </a:p>
+        </p:txBody>
+      </p:sp>
+      <p:sp>
+        <p:nvSpPr>
+          <p:cNvPr id="4" name="Slide Number Placeholder 3"/>
+          <p:cNvSpPr>
+            <a:spLocks noGrp="1"/>
+          </p:cNvSpPr>
+          <p:nvPr>
+            <p:ph type="sldNum" idx="5" sz="quarter"/>
+          </p:nvPr>
+        </p:nvSpPr>
+        <p:spPr/>
+      </p:sp>
+    </p:spTree>
+  </p:cSld>
+  <p:clrMapOvr>
+    <a:masterClrMapping/>
+  </p:clrMapOvr>
+</p:notes>
+</file>
+
+<file path=ppt/notesSlides/notesSlide15.xml><?xml version="1.0" encoding="utf-8"?>
+<p:notes xmlns:a="http://schemas.openxmlformats.org/drawingml/2006/main" xmlns:p="http://schemas.openxmlformats.org/presentationml/2006/main" xmlns:r="http://schemas.openxmlformats.org/officeDocument/2006/relationships">
+  <p:cSld>
+    <p:spTree>
+      <p:nvGrpSpPr>
+        <p:cNvPr id="1" name=""/>
+        <p:cNvGrpSpPr/>
+        <p:nvPr/>
+      </p:nvGrpSpPr>
+      <p:grpSpPr>
+        <a:xfrm>
+          <a:off x="0" y="0"/>
+          <a:ext cx="0" cy="0"/>
+          <a:chOff x="0" y="0"/>
+          <a:chExt cx="0" cy="0"/>
+        </a:xfrm>
+      </p:grpSpPr>
+      <p:sp>
+        <p:nvSpPr>
+          <p:cNvPr id="2" name="Slide Image Placeholder 1"/>
+          <p:cNvSpPr>
+            <a:spLocks noGrp="1"/>
+          </p:cNvSpPr>
+          <p:nvPr>
+            <p:ph type="sldImg" idx="2"/>
+          </p:nvPr>
+        </p:nvSpPr>
+        <p:spPr/>
+      </p:sp>
+      <p:sp>
+        <p:nvSpPr>
+          <p:cNvPr id="3" name="Notes Placeholder 2"/>
+          <p:cNvSpPr>
+            <a:spLocks noGrp="1"/>
+          </p:cNvSpPr>
+          <p:nvPr>
+            <p:ph type="body" idx="3" sz="quarter"/>
+          </p:nvPr>
+        </p:nvSpPr>
+        <p:spPr/>
+        <p:txBody>
+          <a:bodyPr/>
+          <a:lstStyle/>
+          <a:p>
+            <a:r>
+              <a:t>ATISHAY. Section opener. Say: and this is what comes out of it.</a:t>
+            </a:r>
+          </a:p>
+        </p:txBody>
+      </p:sp>
+      <p:sp>
+        <p:nvSpPr>
+          <p:cNvPr id="4" name="Slide Number Placeholder 3"/>
+          <p:cNvSpPr>
+            <a:spLocks noGrp="1"/>
+          </p:cNvSpPr>
+          <p:nvPr>
+            <p:ph type="sldNum" idx="5" sz="quarter"/>
+          </p:nvPr>
+        </p:nvSpPr>
+        <p:spPr/>
+      </p:sp>
+    </p:spTree>
+  </p:cSld>
+  <p:clrMapOvr>
+    <a:masterClrMapping/>
+  </p:clrMapOvr>
+</p:notes>
+</file>
+
+<file path=ppt/notesSlides/notesSlide16.xml><?xml version="1.0" encoding="utf-8"?>
+<p:notes xmlns:a="http://schemas.openxmlformats.org/drawingml/2006/main" xmlns:p="http://schemas.openxmlformats.org/presentationml/2006/main" xmlns:r="http://schemas.openxmlformats.org/officeDocument/2006/relationships">
+  <p:cSld>
+    <p:spTree>
+      <p:nvGrpSpPr>
+        <p:cNvPr id="1" name=""/>
+        <p:cNvGrpSpPr/>
+        <p:nvPr/>
+      </p:nvGrpSpPr>
+      <p:grpSpPr>
+        <a:xfrm>
+          <a:off x="0" y="0"/>
+          <a:ext cx="0" cy="0"/>
+          <a:chOff x="0" y="0"/>
+          <a:chExt cx="0" cy="0"/>
+        </a:xfrm>
+      </p:grpSpPr>
+      <p:sp>
+        <p:nvSpPr>
+          <p:cNvPr id="2" name="Slide Image Placeholder 1"/>
+          <p:cNvSpPr>
+            <a:spLocks noGrp="1"/>
+          </p:cNvSpPr>
+          <p:nvPr>
+            <p:ph type="sldImg" idx="2"/>
+          </p:nvPr>
+        </p:nvSpPr>
+        <p:spPr/>
+      </p:sp>
+      <p:sp>
+        <p:nvSpPr>
+          <p:cNvPr id="3" name="Notes Placeholder 2"/>
+          <p:cNvSpPr>
+            <a:spLocks noGrp="1"/>
+          </p:cNvSpPr>
+          <p:nvPr>
+            <p:ph type="body" idx="3" sz="quarter"/>
+          </p:nvPr>
+        </p:nvSpPr>
+        <p:spPr/>
+        <p:txBody>
+          <a:bodyPr/>
+          <a:lstStyle/>
+          <a:p>
+            <a:r>
+              <a:t>ATISHAY.</a:t>
+            </a:r>
+          </a:p>
+          <a:p>
+            <a:r>
+              <a:t>A first angle A3 sheet with front view, side view, plan, an isometric, dimension lines and a</a:t>
+            </a:r>
+          </a:p>
+          <a:p>
+            <a:r>
+              <a:t>title block. Produced by driving FreeCAD without opening its interface.</a:t>
+            </a:r>
+          </a:p>
+          <a:p>
+            <a:r>
+              <a:t>Alongside it: a STEP file for every part and one for the assembly, which opens in NX,</a:t>
+            </a:r>
+          </a:p>
+          <a:p>
+            <a:r>
+              <a:t>SolidWorks, Fusion and Onshape, a DXF for AutoCAD, and an editable FreeCAD file.</a:t>
+            </a:r>
+          </a:p>
+          <a:p>
+            <a:r>
+              <a:t>STEP is a neutral format, so the output is not locked to our software.</a:t>
+            </a:r>
+          </a:p>
+        </p:txBody>
+      </p:sp>
+      <p:sp>
+        <p:nvSpPr>
+          <p:cNvPr id="4" name="Slide Number Placeholder 3"/>
+          <p:cNvSpPr>
+            <a:spLocks noGrp="1"/>
+          </p:cNvSpPr>
+          <p:nvPr>
+            <p:ph type="sldNum" idx="5" sz="quarter"/>
+          </p:nvPr>
+        </p:nvSpPr>
+        <p:spPr/>
+      </p:sp>
+    </p:spTree>
+  </p:cSld>
+  <p:clrMapOvr>
+    <a:masterClrMapping/>
+  </p:clrMapOvr>
+</p:notes>
+</file>
+
+<file path=ppt/notesSlides/notesSlide17.xml><?xml version="1.0" encoding="utf-8"?>
+<p:notes xmlns:a="http://schemas.openxmlformats.org/drawingml/2006/main" xmlns:p="http://schemas.openxmlformats.org/presentationml/2006/main" xmlns:r="http://schemas.openxmlformats.org/officeDocument/2006/relationships">
+  <p:cSld>
+    <p:spTree>
+      <p:nvGrpSpPr>
+        <p:cNvPr id="1" name=""/>
+        <p:cNvGrpSpPr/>
+        <p:nvPr/>
+      </p:nvGrpSpPr>
+      <p:grpSpPr>
+        <a:xfrm>
+          <a:off x="0" y="0"/>
+          <a:ext cx="0" cy="0"/>
+          <a:chOff x="0" y="0"/>
+          <a:chExt cx="0" cy="0"/>
+        </a:xfrm>
+      </p:grpSpPr>
+      <p:sp>
+        <p:nvSpPr>
+          <p:cNvPr id="2" name="Slide Image Placeholder 1"/>
+          <p:cNvSpPr>
+            <a:spLocks noGrp="1"/>
+          </p:cNvSpPr>
+          <p:nvPr>
+            <p:ph type="sldImg" idx="2"/>
+          </p:nvPr>
+        </p:nvSpPr>
+        <p:spPr/>
+      </p:sp>
+      <p:sp>
+        <p:nvSpPr>
+          <p:cNvPr id="3" name="Notes Placeholder 2"/>
+          <p:cNvSpPr>
+            <a:spLocks noGrp="1"/>
+          </p:cNvSpPr>
+          <p:nvPr>
+            <p:ph type="body" idx="3" sz="quarter"/>
+          </p:nvPr>
+        </p:nvSpPr>
+        <p:spPr/>
+        <p:txBody>
+          <a:bodyPr/>
+          <a:lstStyle/>
+          <a:p>
+            <a:r>
+              <a:t>ATISHAY.</a:t>
+            </a:r>
+          </a:p>
+          <a:p>
+            <a:r>
+              <a:t>The assembled model, which rotates in the browser, and the same joint coloured by how close each</a:t>
+            </a:r>
+          </a:p>
+          <a:p>
+            <a:r>
+              <a:t>part is to its limit.</a:t>
+            </a:r>
+          </a:p>
+          <a:p>
+            <a:r>
+              <a:t>The colouring is useful because it puts the weakest member in front of you without reading a</a:t>
+            </a:r>
+          </a:p>
+          <a:p>
+            <a:r>
+              <a:t>table.</a:t>
+            </a:r>
+          </a:p>
+        </p:txBody>
+      </p:sp>
+      <p:sp>
+        <p:nvSpPr>
+          <p:cNvPr id="4" name="Slide Number Placeholder 3"/>
+          <p:cNvSpPr>
+            <a:spLocks noGrp="1"/>
+          </p:cNvSpPr>
+          <p:nvPr>
+            <p:ph type="sldNum" idx="5" sz="quarter"/>
+          </p:nvPr>
+        </p:nvSpPr>
+        <p:spPr/>
+      </p:sp>
+    </p:spTree>
+  </p:cSld>
+  <p:clrMapOvr>
+    <a:masterClrMapping/>
+  </p:clrMapOvr>
+</p:notes>
+</file>
+
+<file path=ppt/notesSlides/notesSlide18.xml><?xml version="1.0" encoding="utf-8"?>
+<p:notes xmlns:a="http://schemas.openxmlformats.org/drawingml/2006/main" xmlns:p="http://schemas.openxmlformats.org/presentationml/2006/main" xmlns:r="http://schemas.openxmlformats.org/officeDocument/2006/relationships">
+  <p:cSld>
+    <p:spTree>
+      <p:nvGrpSpPr>
+        <p:cNvPr id="1" name=""/>
+        <p:cNvGrpSpPr/>
+        <p:nvPr/>
+      </p:nvGrpSpPr>
+      <p:grpSpPr>
+        <a:xfrm>
+          <a:off x="0" y="0"/>
+          <a:ext cx="0" cy="0"/>
+          <a:chOff x="0" y="0"/>
+          <a:chExt cx="0" cy="0"/>
+        </a:xfrm>
+      </p:grpSpPr>
+      <p:sp>
+        <p:nvSpPr>
+          <p:cNvPr id="2" name="Slide Image Placeholder 1"/>
+          <p:cNvSpPr>
+            <a:spLocks noGrp="1"/>
+          </p:cNvSpPr>
+          <p:nvPr>
+            <p:ph type="sldImg" idx="2"/>
+          </p:nvPr>
+        </p:nvSpPr>
+        <p:spPr/>
+      </p:sp>
+      <p:sp>
+        <p:nvSpPr>
+          <p:cNvPr id="3" name="Notes Placeholder 2"/>
+          <p:cNvSpPr>
+            <a:spLocks noGrp="1"/>
+          </p:cNvSpPr>
+          <p:nvPr>
+            <p:ph type="body" idx="3" sz="quarter"/>
+          </p:nvPr>
+        </p:nvSpPr>
+        <p:spPr/>
+        <p:txBody>
+          <a:bodyPr/>
+          <a:lstStyle/>
+          <a:p>
+            <a:r>
+              <a:t>DHARMENDRA. Section opener. Say: now, how do we know any of this is correct.</a:t>
+            </a:r>
+          </a:p>
+        </p:txBody>
+      </p:sp>
+      <p:sp>
+        <p:nvSpPr>
+          <p:cNvPr id="4" name="Slide Number Placeholder 3"/>
+          <p:cNvSpPr>
+            <a:spLocks noGrp="1"/>
+          </p:cNvSpPr>
+          <p:nvPr>
+            <p:ph type="sldNum" idx="5" sz="quarter"/>
+          </p:nvPr>
+        </p:nvSpPr>
+        <p:spPr/>
+      </p:sp>
+    </p:spTree>
+  </p:cSld>
+  <p:clrMapOvr>
+    <a:masterClrMapping/>
+  </p:clrMapOvr>
+</p:notes>
+</file>
+
+<file path=ppt/notesSlides/notesSlide19.xml><?xml version="1.0" encoding="utf-8"?>
+<p:notes xmlns:a="http://schemas.openxmlformats.org/drawingml/2006/main" xmlns:p="http://schemas.openxmlformats.org/presentationml/2006/main" xmlns:r="http://schemas.openxmlformats.org/officeDocument/2006/relationships">
+  <p:cSld>
+    <p:spTree>
+      <p:nvGrpSpPr>
+        <p:cNvPr id="1" name=""/>
+        <p:cNvGrpSpPr/>
+        <p:nvPr/>
+      </p:nvGrpSpPr>
+      <p:grpSpPr>
+        <a:xfrm>
+          <a:off x="0" y="0"/>
+          <a:ext cx="0" cy="0"/>
+          <a:chOff x="0" y="0"/>
+          <a:chExt cx="0" cy="0"/>
+        </a:xfrm>
+      </p:grpSpPr>
+      <p:sp>
+        <p:nvSpPr>
+          <p:cNvPr id="2" name="Slide Image Placeholder 1"/>
+          <p:cNvSpPr>
+            <a:spLocks noGrp="1"/>
+          </p:cNvSpPr>
+          <p:nvPr>
+            <p:ph type="sldImg" idx="2"/>
+          </p:nvPr>
+        </p:nvSpPr>
+        <p:spPr/>
+      </p:sp>
+      <p:sp>
+        <p:nvSpPr>
+          <p:cNvPr id="3" name="Notes Placeholder 2"/>
+          <p:cNvSpPr>
+            <a:spLocks noGrp="1"/>
+          </p:cNvSpPr>
+          <p:nvPr>
+            <p:ph type="body" idx="3" sz="quarter"/>
+          </p:nvPr>
+        </p:nvSpPr>
+        <p:spPr/>
+        <p:txBody>
+          <a:bodyPr/>
+          <a:lstStyle/>
+          <a:p>
+            <a:r>
+              <a:t>DHARMENDRA.</a:t>
+            </a:r>
+          </a:p>
+          <a:p>
+            <a:r>
+              <a:t>Every proportion and every check was compared against the three sources.</a:t>
+            </a:r>
+          </a:p>
+          <a:p>
+            <a:r>
+              <a:t>Knuckle and cotter are fully verified. The cotter joint is verified twice over, against two</a:t>
+            </a:r>
+          </a:p>
+          <a:p>
+            <a:r>
+              <a:t>independent books.</a:t>
+            </a:r>
+          </a:p>
+          <a:p>
+            <a:r>
+              <a:t>Two entries are honest limitations rather than gaps. For the flange coupling all seven checks</a:t>
+            </a:r>
+          </a:p>
+          <a:p>
+            <a:r>
+              <a:t>are verified twice, but the proportions cannot be verified, because Leutwiler records that no</a:t>
+            </a:r>
+          </a:p>
+          <a:p>
+            <a:r>
+              <a:t>standard set of flange coupling proportions was ever agreed and that published tables are</a:t>
+            </a:r>
+          </a:p>
+          <a:p>
+            <a:r>
+              <a:t>individual manufacturers' practice. For the sleeve and cotter joint we searched four books and</a:t>
+            </a:r>
+          </a:p>
+          <a:p>
+            <a:r>
+              <a:t>none covers it by name.</a:t>
+            </a:r>
+          </a:p>
+          <a:p>
+            <a:r>
+              <a:t>Where no source exists, the software says so on every single run rather than implying one.</a:t>
+            </a:r>
+          </a:p>
+        </p:txBody>
+      </p:sp>
+      <p:sp>
+        <p:nvSpPr>
+          <p:cNvPr id="4" name="Slide Number Placeholder 3"/>
+          <p:cNvSpPr>
+            <a:spLocks noGrp="1"/>
+          </p:cNvSpPr>
+          <p:nvPr>
+            <p:ph type="sldNum" idx="5" sz="quarter"/>
+          </p:nvPr>
+        </p:nvSpPr>
+        <p:spPr/>
+      </p:sp>
+    </p:spTree>
+  </p:cSld>
+  <p:clrMapOvr>
+    <a:masterClrMapping/>
+  </p:clrMapOvr>
+</p:notes>
+</file>
+
+<file path=ppt/notesSlides/notesSlide2.xml><?xml version="1.0" encoding="utf-8"?>
+<p:notes xmlns:a="http://schemas.openxmlformats.org/drawingml/2006/main" xmlns:p="http://schemas.openxmlformats.org/presentationml/2006/main" xmlns:r="http://schemas.openxmlformats.org/officeDocument/2006/relationships">
+  <p:cSld>
+    <p:spTree>
+      <p:nvGrpSpPr>
+        <p:cNvPr id="1" name=""/>
+        <p:cNvGrpSpPr/>
+        <p:nvPr/>
+      </p:nvGrpSpPr>
+      <p:grpSpPr>
+        <a:xfrm>
+          <a:off x="0" y="0"/>
+          <a:ext cx="0" cy="0"/>
+          <a:chOff x="0" y="0"/>
+          <a:chExt cx="0" cy="0"/>
+        </a:xfrm>
+      </p:grpSpPr>
+      <p:sp>
+        <p:nvSpPr>
+          <p:cNvPr id="2" name="Slide Image Placeholder 1"/>
+          <p:cNvSpPr>
+            <a:spLocks noGrp="1"/>
+          </p:cNvSpPr>
+          <p:nvPr>
+            <p:ph type="sldImg" idx="2"/>
+          </p:nvPr>
+        </p:nvSpPr>
+        <p:spPr/>
+      </p:sp>
+      <p:sp>
+        <p:nvSpPr>
+          <p:cNvPr id="3" name="Notes Placeholder 2"/>
+          <p:cNvSpPr>
+            <a:spLocks noGrp="1"/>
+          </p:cNvSpPr>
+          <p:nvPr>
+            <p:ph type="body" idx="3" sz="quarter"/>
+          </p:nvPr>
+        </p:nvSpPr>
+        <p:spPr/>
+        <p:txBody>
+          <a:bodyPr/>
+          <a:lstStyle/>
+          <a:p>
+            <a:r>
+              <a:t>ANSH. Section opener. Say only: first, why this problem is worth solving at all.</a:t>
+            </a:r>
+          </a:p>
+        </p:txBody>
+      </p:sp>
+      <p:sp>
+        <p:nvSpPr>
+          <p:cNvPr id="4" name="Slide Number Placeholder 3"/>
+          <p:cNvSpPr>
+            <a:spLocks noGrp="1"/>
+          </p:cNvSpPr>
+          <p:nvPr>
+            <p:ph type="sldNum" idx="5" sz="quarter"/>
+          </p:nvPr>
+        </p:nvSpPr>
+        <p:spPr/>
+      </p:sp>
+    </p:spTree>
+  </p:cSld>
+  <p:clrMapOvr>
+    <a:masterClrMapping/>
+  </p:clrMapOvr>
+</p:notes>
+</file>
+
+<file path=ppt/notesSlides/notesSlide20.xml><?xml version="1.0" encoding="utf-8"?>
+<p:notes xmlns:a="http://schemas.openxmlformats.org/drawingml/2006/main" xmlns:p="http://schemas.openxmlformats.org/presentationml/2006/main" xmlns:r="http://schemas.openxmlformats.org/officeDocument/2006/relationships">
+  <p:cSld>
+    <p:spTree>
+      <p:nvGrpSpPr>
+        <p:cNvPr id="1" name=""/>
+        <p:cNvGrpSpPr/>
+        <p:nvPr/>
+      </p:nvGrpSpPr>
+      <p:grpSpPr>
+        <a:xfrm>
+          <a:off x="0" y="0"/>
+          <a:ext cx="0" cy="0"/>
+          <a:chOff x="0" y="0"/>
+          <a:chExt cx="0" cy="0"/>
+        </a:xfrm>
+      </p:grpSpPr>
+      <p:sp>
+        <p:nvSpPr>
+          <p:cNvPr id="2" name="Slide Image Placeholder 1"/>
+          <p:cNvSpPr>
+            <a:spLocks noGrp="1"/>
+          </p:cNvSpPr>
+          <p:nvPr>
+            <p:ph type="sldImg" idx="2"/>
+          </p:nvPr>
+        </p:nvSpPr>
+        <p:spPr/>
+      </p:sp>
+      <p:sp>
+        <p:nvSpPr>
+          <p:cNvPr id="3" name="Notes Placeholder 2"/>
+          <p:cNvSpPr>
+            <a:spLocks noGrp="1"/>
+          </p:cNvSpPr>
+          <p:nvPr>
+            <p:ph type="body" idx="3" sz="quarter"/>
+          </p:nvPr>
+        </p:nvSpPr>
+        <p:spPr/>
+        <p:txBody>
+          <a:bodyPr/>
+          <a:lstStyle/>
+          <a:p>
+            <a:r>
+              <a:t>DHARMENDRA.</a:t>
+            </a:r>
+          </a:p>
+          <a:p>
+            <a:r>
+              <a:t>The first of three errors we found in the published sources.</a:t>
+            </a:r>
+          </a:p>
+          <a:p>
+            <a:r>
+              <a:t>The knuckle worked problem raises the pin from 40 to 55 millimetres to satisfy bending, then</a:t>
+            </a:r>
+          </a:p>
+          <a:p>
+            <a:r>
+              <a:t>checks the eye using the original 40 millimetre pin.</a:t>
+            </a:r>
+          </a:p>
+          <a:p>
+            <a:r>
+              <a:t>Put the pin it actually adopted into its own expression and you get 80 MPa against an allowable</a:t>
+            </a:r>
+          </a:p>
+          <a:p>
+            <a:r>
+              <a:t>of 65. Its own answer fails its own check by 23 percent.</a:t>
+            </a:r>
+          </a:p>
+          <a:p>
+            <a:r>
+              <a:t>Our software instead enlarges the outer diameter of the eye until the check passes, and reports</a:t>
+            </a:r>
+          </a:p>
+          <a:p>
+            <a:r>
+              <a:t>that it has done so.</a:t>
+            </a:r>
+          </a:p>
+        </p:txBody>
+      </p:sp>
+      <p:sp>
+        <p:nvSpPr>
+          <p:cNvPr id="4" name="Slide Number Placeholder 3"/>
+          <p:cNvSpPr>
+            <a:spLocks noGrp="1"/>
+          </p:cNvSpPr>
+          <p:nvPr>
+            <p:ph type="sldNum" idx="5" sz="quarter"/>
+          </p:nvPr>
+        </p:nvSpPr>
+        <p:spPr/>
+      </p:sp>
+    </p:spTree>
+  </p:cSld>
+  <p:clrMapOvr>
+    <a:masterClrMapping/>
+  </p:clrMapOvr>
+</p:notes>
+</file>
+
+<file path=ppt/notesSlides/notesSlide21.xml><?xml version="1.0" encoding="utf-8"?>
+<p:notes xmlns:a="http://schemas.openxmlformats.org/drawingml/2006/main" xmlns:p="http://schemas.openxmlformats.org/presentationml/2006/main" xmlns:r="http://schemas.openxmlformats.org/officeDocument/2006/relationships">
+  <p:cSld>
+    <p:spTree>
+      <p:nvGrpSpPr>
+        <p:cNvPr id="1" name=""/>
+        <p:cNvGrpSpPr/>
+        <p:nvPr/>
+      </p:nvGrpSpPr>
+      <p:grpSpPr>
+        <a:xfrm>
+          <a:off x="0" y="0"/>
+          <a:ext cx="0" cy="0"/>
+          <a:chOff x="0" y="0"/>
+          <a:chExt cx="0" cy="0"/>
+        </a:xfrm>
+      </p:grpSpPr>
+      <p:sp>
+        <p:nvSpPr>
+          <p:cNvPr id="2" name="Slide Image Placeholder 1"/>
+          <p:cNvSpPr>
+            <a:spLocks noGrp="1"/>
+          </p:cNvSpPr>
+          <p:nvPr>
+            <p:ph type="sldImg" idx="2"/>
+          </p:nvPr>
+        </p:nvSpPr>
+        <p:spPr/>
+      </p:sp>
+      <p:sp>
+        <p:nvSpPr>
+          <p:cNvPr id="3" name="Notes Placeholder 2"/>
+          <p:cNvSpPr>
+            <a:spLocks noGrp="1"/>
+          </p:cNvSpPr>
+          <p:nvPr>
+            <p:ph type="body" idx="3" sz="quarter"/>
+          </p:nvPr>
+        </p:nvSpPr>
+        <p:spPr/>
+        <p:txBody>
+          <a:bodyPr/>
+          <a:lstStyle/>
+          <a:p>
+            <a:r>
+              <a:t>DHARMENDRA.</a:t>
+            </a:r>
+          </a:p>
+          <a:p>
+            <a:r>
+              <a:t>Two more.</a:t>
+            </a:r>
+          </a:p>
+          <a:p>
+            <a:r>
+              <a:t>The cotter procedure checks crushing of the socket but never crushing between the cotter and the</a:t>
+            </a:r>
+          </a:p>
+          <a:p>
+            <a:r>
+              <a:t>spigot. At its own final answer that omitted check reads 167 MPa against 110 allowed. Leutwiler</a:t>
+            </a:r>
+          </a:p>
+          <a:p>
+            <a:r>
+              <a:t>lists it as one of ten failure modes, which is what makes it an omission and not a preference.</a:t>
+            </a:r>
+          </a:p>
+          <a:p>
+            <a:r>
+              <a:t>Second, the bolt tightening constant is printed as 284 d kilonewtons, but the worked example on</a:t>
+            </a:r>
+          </a:p>
+          <a:p>
+            <a:r>
+              <a:t>the same page gives 56.8 kN for an M20 bolt. That only works if the constant is 2840 d newtons.</a:t>
+            </a:r>
+          </a:p>
+          <a:p>
+            <a:r>
+              <a:t>The page refutes itself, and it is out by a factor of ten.</a:t>
+            </a:r>
+          </a:p>
+          <a:p>
+            <a:r>
+              <a:t>We found none of these by reading. We found them because the software computes every check and</a:t>
+            </a:r>
+          </a:p>
+          <a:p>
+            <a:r>
+              <a:t>prints the arithmetic.</a:t>
+            </a:r>
+          </a:p>
+        </p:txBody>
+      </p:sp>
+      <p:sp>
+        <p:nvSpPr>
+          <p:cNvPr id="4" name="Slide Number Placeholder 3"/>
+          <p:cNvSpPr>
+            <a:spLocks noGrp="1"/>
+          </p:cNvSpPr>
+          <p:nvPr>
+            <p:ph type="sldNum" idx="5" sz="quarter"/>
+          </p:nvPr>
+        </p:nvSpPr>
+        <p:spPr/>
+      </p:sp>
+    </p:spTree>
+  </p:cSld>
+  <p:clrMapOvr>
+    <a:masterClrMapping/>
+  </p:clrMapOvr>
+</p:notes>
+</file>
+
+<file path=ppt/notesSlides/notesSlide22.xml><?xml version="1.0" encoding="utf-8"?>
+<p:notes xmlns:a="http://schemas.openxmlformats.org/drawingml/2006/main" xmlns:p="http://schemas.openxmlformats.org/presentationml/2006/main" xmlns:r="http://schemas.openxmlformats.org/officeDocument/2006/relationships">
+  <p:cSld>
+    <p:spTree>
+      <p:nvGrpSpPr>
+        <p:cNvPr id="1" name=""/>
+        <p:cNvGrpSpPr/>
+        <p:nvPr/>
+      </p:nvGrpSpPr>
+      <p:grpSpPr>
+        <a:xfrm>
+          <a:off x="0" y="0"/>
+          <a:ext cx="0" cy="0"/>
+          <a:chOff x="0" y="0"/>
+          <a:chExt cx="0" cy="0"/>
+        </a:xfrm>
+      </p:grpSpPr>
+      <p:sp>
+        <p:nvSpPr>
+          <p:cNvPr id="2" name="Slide Image Placeholder 1"/>
+          <p:cNvSpPr>
+            <a:spLocks noGrp="1"/>
+          </p:cNvSpPr>
+          <p:nvPr>
+            <p:ph type="sldImg" idx="2"/>
+          </p:nvPr>
+        </p:nvSpPr>
+        <p:spPr/>
+      </p:sp>
+      <p:sp>
+        <p:nvSpPr>
+          <p:cNvPr id="3" name="Notes Placeholder 2"/>
+          <p:cNvSpPr>
+            <a:spLocks noGrp="1"/>
+          </p:cNvSpPr>
+          <p:nvPr>
+            <p:ph type="body" idx="3" sz="quarter"/>
+          </p:nvPr>
+        </p:nvSpPr>
+        <p:spPr/>
+        <p:txBody>
+          <a:bodyPr/>
+          <a:lstStyle/>
+          <a:p>
+            <a:r>
+              <a:t>ANKUR. Section opener. Say: finally, how the work is validated and what it does not do.</a:t>
+            </a:r>
+          </a:p>
+        </p:txBody>
+      </p:sp>
+      <p:sp>
+        <p:nvSpPr>
+          <p:cNvPr id="4" name="Slide Number Placeholder 3"/>
+          <p:cNvSpPr>
+            <a:spLocks noGrp="1"/>
+          </p:cNvSpPr>
+          <p:nvPr>
+            <p:ph type="sldNum" idx="5" sz="quarter"/>
+          </p:nvPr>
+        </p:nvSpPr>
+        <p:spPr/>
+      </p:sp>
+    </p:spTree>
+  </p:cSld>
+  <p:clrMapOvr>
+    <a:masterClrMapping/>
+  </p:clrMapOvr>
+</p:notes>
+</file>
+
+<file path=ppt/notesSlides/notesSlide23.xml><?xml version="1.0" encoding="utf-8"?>
+<p:notes xmlns:a="http://schemas.openxmlformats.org/drawingml/2006/main" xmlns:p="http://schemas.openxmlformats.org/presentationml/2006/main" xmlns:r="http://schemas.openxmlformats.org/officeDocument/2006/relationships">
+  <p:cSld>
+    <p:spTree>
+      <p:nvGrpSpPr>
+        <p:cNvPr id="1" name=""/>
+        <p:cNvGrpSpPr/>
+        <p:nvPr/>
+      </p:nvGrpSpPr>
+      <p:grpSpPr>
+        <a:xfrm>
+          <a:off x="0" y="0"/>
+          <a:ext cx="0" cy="0"/>
+          <a:chOff x="0" y="0"/>
+          <a:chExt cx="0" cy="0"/>
+        </a:xfrm>
+      </p:grpSpPr>
+      <p:sp>
+        <p:nvSpPr>
+          <p:cNvPr id="2" name="Slide Image Placeholder 1"/>
+          <p:cNvSpPr>
+            <a:spLocks noGrp="1"/>
+          </p:cNvSpPr>
+          <p:nvPr>
+            <p:ph type="sldImg" idx="2"/>
+          </p:nvPr>
+        </p:nvSpPr>
+        <p:spPr/>
+      </p:sp>
+      <p:sp>
+        <p:nvSpPr>
+          <p:cNvPr id="3" name="Notes Placeholder 2"/>
+          <p:cNvSpPr>
+            <a:spLocks noGrp="1"/>
+          </p:cNvSpPr>
+          <p:nvPr>
+            <p:ph type="body" idx="3" sz="quarter"/>
+          </p:nvPr>
+        </p:nvSpPr>
+        <p:spPr/>
+        <p:txBody>
+          <a:bodyPr/>
+          <a:lstStyle/>
+          <a:p>
+            <a:r>
+              <a:t>ANKUR.</a:t>
+            </a:r>
+          </a:p>
+          <a:p>
+            <a:r>
+              <a:t>An independent finite element cross check.</a:t>
+            </a:r>
+          </a:p>
+          <a:p>
+            <a:r>
+              <a:t>First validated on a case with a known answer: a 20 mm bar in tension, formula 31.83, computed</a:t>
+            </a:r>
+          </a:p>
+          <a:p>
+            <a:r>
+              <a:t>32.22, a difference of 1.2 percent.</a:t>
+            </a:r>
+          </a:p>
+          <a:p>
+            <a:r>
+              <a:t>On the knuckle eye rod: formula 52.0, computed 57.9, about 11.5 percent higher. That is expected,</a:t>
+            </a:r>
+          </a:p>
+          <a:p>
+            <a:r>
+              <a:t>because the formula treats the rod as a plain bar and ignores the stress raised at the pin bore.</a:t>
+            </a:r>
+          </a:p>
+          <a:p>
+            <a:r>
+              <a:t>Both stay under the 75 MPa allowable.</a:t>
+            </a:r>
+          </a:p>
+          <a:p>
+            <a:r>
+              <a:t>The important part: a peak that never settles is not a stress. On one part the computed peak</a:t>
+            </a:r>
+          </a:p>
+          <a:p>
+            <a:r>
+              <a:t>moved between 157 and 191 MPa as we refined the mesh sixteen fold. So the software re-solves on</a:t>
+            </a:r>
+          </a:p>
+          <a:p>
+            <a:r>
+              <a:t>a finer mesh and reports NOT CONVERGED when the number will not settle, and tells you to design</a:t>
+            </a:r>
+          </a:p>
+          <a:p>
+            <a:r>
+              <a:t>to the hand calculation.</a:t>
+            </a:r>
+          </a:p>
+        </p:txBody>
+      </p:sp>
+      <p:sp>
+        <p:nvSpPr>
+          <p:cNvPr id="4" name="Slide Number Placeholder 3"/>
+          <p:cNvSpPr>
+            <a:spLocks noGrp="1"/>
+          </p:cNvSpPr>
+          <p:nvPr>
+            <p:ph type="sldNum" idx="5" sz="quarter"/>
+          </p:nvPr>
+        </p:nvSpPr>
+        <p:spPr/>
+      </p:sp>
+    </p:spTree>
+  </p:cSld>
+  <p:clrMapOvr>
+    <a:masterClrMapping/>
+  </p:clrMapOvr>
+</p:notes>
+</file>
+
+<file path=ppt/notesSlides/notesSlide24.xml><?xml version="1.0" encoding="utf-8"?>
+<p:notes xmlns:a="http://schemas.openxmlformats.org/drawingml/2006/main" xmlns:p="http://schemas.openxmlformats.org/presentationml/2006/main" xmlns:r="http://schemas.openxmlformats.org/officeDocument/2006/relationships">
+  <p:cSld>
+    <p:spTree>
+      <p:nvGrpSpPr>
+        <p:cNvPr id="1" name=""/>
+        <p:cNvGrpSpPr/>
+        <p:nvPr/>
+      </p:nvGrpSpPr>
+      <p:grpSpPr>
+        <a:xfrm>
+          <a:off x="0" y="0"/>
+          <a:ext cx="0" cy="0"/>
+          <a:chOff x="0" y="0"/>
+          <a:chExt cx="0" cy="0"/>
+        </a:xfrm>
+      </p:grpSpPr>
+      <p:sp>
+        <p:nvSpPr>
+          <p:cNvPr id="2" name="Slide Image Placeholder 1"/>
+          <p:cNvSpPr>
+            <a:spLocks noGrp="1"/>
+          </p:cNvSpPr>
+          <p:nvPr>
+            <p:ph type="sldImg" idx="2"/>
+          </p:nvPr>
+        </p:nvSpPr>
+        <p:spPr/>
+      </p:sp>
+      <p:sp>
+        <p:nvSpPr>
+          <p:cNvPr id="3" name="Notes Placeholder 2"/>
+          <p:cNvSpPr>
+            <a:spLocks noGrp="1"/>
+          </p:cNvSpPr>
+          <p:nvPr>
+            <p:ph type="body" idx="3" sz="quarter"/>
+          </p:nvPr>
+        </p:nvSpPr>
+        <p:spPr/>
+        <p:txBody>
+          <a:bodyPr/>
+          <a:lstStyle/>
+          <a:p>
+            <a:r>
+              <a:t>ANKUR.</a:t>
+            </a:r>
+          </a:p>
+          <a:p>
+            <a:r>
+              <a:t>290 automated tests run on every change: the arithmetic, the geometry, the parsing, the drawing</a:t>
+            </a:r>
+          </a:p>
+          <a:p>
+            <a:r>
+              <a:t>and the analysis.</a:t>
+            </a:r>
+          </a:p>
+          <a:p>
+            <a:r>
+              <a:t>The row that matters most is the last one. There are tests that assert the three errors in the</a:t>
+            </a:r>
+          </a:p>
+          <a:p>
+            <a:r>
+              <a:t>books are real. Without them, someone could later correct our software back to the printed</a:t>
+            </a:r>
+          </a:p>
+          <a:p>
+            <a:r>
+              <a:t>answers and every other test would still pass.</a:t>
+            </a:r>
+          </a:p>
+          <a:p>
+            <a:r>
+              <a:t>One test found something no dimension check could: comparing the solids pairwise caught a gib</a:t>
+            </a:r>
+          </a:p>
+          <a:p>
+            <a:r>
+              <a:t>hook modelled 1.25 millimetres inside the strap, occupying metal another part already occupied,</a:t>
+            </a:r>
+          </a:p>
+          <a:p>
+            <a:r>
+              <a:t>while every individual dimension was correct.</a:t>
+            </a:r>
+          </a:p>
+        </p:txBody>
+      </p:sp>
+      <p:sp>
+        <p:nvSpPr>
+          <p:cNvPr id="4" name="Slide Number Placeholder 3"/>
+          <p:cNvSpPr>
+            <a:spLocks noGrp="1"/>
+          </p:cNvSpPr>
+          <p:nvPr>
+            <p:ph type="sldNum" idx="5" sz="quarter"/>
+          </p:nvPr>
+        </p:nvSpPr>
+        <p:spPr/>
+      </p:sp>
+    </p:spTree>
+  </p:cSld>
+  <p:clrMapOvr>
+    <a:masterClrMapping/>
+  </p:clrMapOvr>
+</p:notes>
+</file>
+
+<file path=ppt/notesSlides/notesSlide25.xml><?xml version="1.0" encoding="utf-8"?>
+<p:notes xmlns:a="http://schemas.openxmlformats.org/drawingml/2006/main" xmlns:p="http://schemas.openxmlformats.org/presentationml/2006/main" xmlns:r="http://schemas.openxmlformats.org/officeDocument/2006/relationships">
+  <p:cSld>
+    <p:spTree>
+      <p:nvGrpSpPr>
+        <p:cNvPr id="1" name=""/>
+        <p:cNvGrpSpPr/>
+        <p:nvPr/>
+      </p:nvGrpSpPr>
+      <p:grpSpPr>
+        <a:xfrm>
+          <a:off x="0" y="0"/>
+          <a:ext cx="0" cy="0"/>
+          <a:chOff x="0" y="0"/>
+          <a:chExt cx="0" cy="0"/>
+        </a:xfrm>
+      </p:grpSpPr>
+      <p:sp>
+        <p:nvSpPr>
+          <p:cNvPr id="2" name="Slide Image Placeholder 1"/>
+          <p:cNvSpPr>
+            <a:spLocks noGrp="1"/>
+          </p:cNvSpPr>
+          <p:nvPr>
+            <p:ph type="sldImg" idx="2"/>
+          </p:nvPr>
+        </p:nvSpPr>
+        <p:spPr/>
+      </p:sp>
+      <p:sp>
+        <p:nvSpPr>
+          <p:cNvPr id="3" name="Notes Placeholder 2"/>
+          <p:cNvSpPr>
+            <a:spLocks noGrp="1"/>
+          </p:cNvSpPr>
+          <p:nvPr>
+            <p:ph type="body" idx="3" sz="quarter"/>
+          </p:nvPr>
+        </p:nvSpPr>
+        <p:spPr/>
+        <p:txBody>
+          <a:bodyPr/>
+          <a:lstStyle/>
+          <a:p>
+            <a:r>
+              <a:t>ANKUR.</a:t>
+            </a:r>
+          </a:p>
+          <a:p>
+            <a:r>
+              <a:t>What it does not do, said before anyone asks.</a:t>
+            </a:r>
+          </a:p>
+          <a:p>
+            <a:r>
+              <a:t>Static loading only, so no fatigue and no stress concentration factors. Nominal dimensions only,</a:t>
+            </a:r>
+          </a:p>
+          <a:p>
+            <a:r>
+              <a:t>so no tolerances or fits, which means the sheet is not yet a manufacturing drawing. Two of the</a:t>
+            </a:r>
+          </a:p>
+          <a:p>
+            <a:r>
+              <a:t>six joints have proportions with no book behind them, and the software says so every run. Nut</a:t>
+            </a:r>
+          </a:p>
+          <a:p>
+            <a:r>
+              <a:t>thread stripping is not checked.</a:t>
+            </a:r>
+          </a:p>
+          <a:p>
+            <a:r>
+              <a:t>Future scope: riveted and welded joints follow the same pattern, then fatigue, then tolerances</a:t>
+            </a:r>
+          </a:p>
+          <a:p>
+            <a:r>
+              <a:t>and fits, then a journal script so the assembly builds inside NX rather than being imported.</a:t>
+            </a:r>
+          </a:p>
+        </p:txBody>
+      </p:sp>
+      <p:sp>
+        <p:nvSpPr>
+          <p:cNvPr id="4" name="Slide Number Placeholder 3"/>
+          <p:cNvSpPr>
+            <a:spLocks noGrp="1"/>
+          </p:cNvSpPr>
+          <p:nvPr>
+            <p:ph type="sldNum" idx="5" sz="quarter"/>
+          </p:nvPr>
+        </p:nvSpPr>
+        <p:spPr/>
+      </p:sp>
+    </p:spTree>
+  </p:cSld>
+  <p:clrMapOvr>
+    <a:masterClrMapping/>
+  </p:clrMapOvr>
+</p:notes>
+</file>
+
+<file path=ppt/notesSlides/notesSlide26.xml><?xml version="1.0" encoding="utf-8"?>
+<p:notes xmlns:a="http://schemas.openxmlformats.org/drawingml/2006/main" xmlns:p="http://schemas.openxmlformats.org/presentationml/2006/main" xmlns:r="http://schemas.openxmlformats.org/officeDocument/2006/relationships">
+  <p:cSld>
+    <p:spTree>
+      <p:nvGrpSpPr>
+        <p:cNvPr id="1" name=""/>
+        <p:cNvGrpSpPr/>
+        <p:nvPr/>
+      </p:nvGrpSpPr>
+      <p:grpSpPr>
+        <a:xfrm>
+          <a:off x="0" y="0"/>
+          <a:ext cx="0" cy="0"/>
+          <a:chOff x="0" y="0"/>
+          <a:chExt cx="0" cy="0"/>
+        </a:xfrm>
+      </p:grpSpPr>
+      <p:sp>
+        <p:nvSpPr>
+          <p:cNvPr id="2" name="Slide Image Placeholder 1"/>
+          <p:cNvSpPr>
+            <a:spLocks noGrp="1"/>
+          </p:cNvSpPr>
+          <p:nvPr>
+            <p:ph type="sldImg" idx="2"/>
+          </p:nvPr>
+        </p:nvSpPr>
+        <p:spPr/>
+      </p:sp>
+      <p:sp>
+        <p:nvSpPr>
+          <p:cNvPr id="3" name="Notes Placeholder 2"/>
+          <p:cNvSpPr>
+            <a:spLocks noGrp="1"/>
+          </p:cNvSpPr>
+          <p:nvPr>
+            <p:ph type="body" idx="3" sz="quarter"/>
+          </p:nvPr>
+        </p:nvSpPr>
+        <p:spPr/>
+        <p:txBody>
+          <a:bodyPr/>
+          <a:lstStyle/>
+          <a:p>
+            <a:r>
+              <a:t>ANKUR.</a:t>
+            </a:r>
+          </a:p>
+          <a:p>
+            <a:r>
+              <a:t>To close.</a:t>
+            </a:r>
+          </a:p>
+          <a:p>
+            <a:r>
+              <a:t>Every dimension this software produces can be traced to a formula, and every formula to a page</a:t>
+            </a:r>
+          </a:p>
+          <a:p>
+            <a:r>
+              <a:t>in a book. That is the difference between a tool that designs and one that only draws.</a:t>
+            </a:r>
+          </a:p>
+          <a:p>
+            <a:r>
+              <a:t>The language model reads the requirement. The engineering stays deterministic, checked, and open</a:t>
+            </a:r>
+          </a:p>
+          <a:p>
+            <a:r>
+              <a:t>to inspection.</a:t>
+            </a:r>
+          </a:p>
+          <a:p>
+            <a:r>
+              <a:t>Six joints, 44 checks, 290 tests, and three errors found in published literature along the way.</a:t>
+            </a:r>
+          </a:p>
+          <a:p>
+            <a:r>
+              <a:t>Thank you. We are happy to take questions.</a:t>
+            </a:r>
+          </a:p>
+        </p:txBody>
+      </p:sp>
+      <p:sp>
+        <p:nvSpPr>
+          <p:cNvPr id="4" name="Slide Number Placeholder 3"/>
+          <p:cNvSpPr>
+            <a:spLocks noGrp="1"/>
+          </p:cNvSpPr>
+          <p:nvPr>
+            <p:ph type="sldNum" idx="5" sz="quarter"/>
+          </p:nvPr>
+        </p:nvSpPr>
+        <p:spPr/>
+      </p:sp>
+    </p:spTree>
+  </p:cSld>
+  <p:clrMapOvr>
+    <a:masterClrMapping/>
+  </p:clrMapOvr>
+</p:notes>
+</file>
+
+<file path=ppt/notesSlides/notesSlide3.xml><?xml version="1.0" encoding="utf-8"?>
+<p:notes xmlns:a="http://schemas.openxmlformats.org/drawingml/2006/main" xmlns:p="http://schemas.openxmlformats.org/presentationml/2006/main" xmlns:r="http://schemas.openxmlformats.org/officeDocument/2006/relationships">
+  <p:cSld>
+    <p:spTree>
+      <p:nvGrpSpPr>
+        <p:cNvPr id="1" name=""/>
+        <p:cNvGrpSpPr/>
+        <p:nvPr/>
+      </p:nvGrpSpPr>
+      <p:grpSpPr>
+        <a:xfrm>
+          <a:off x="0" y="0"/>
+          <a:ext cx="0" cy="0"/>
+          <a:chOff x="0" y="0"/>
+          <a:chExt cx="0" cy="0"/>
+        </a:xfrm>
+      </p:grpSpPr>
+      <p:sp>
+        <p:nvSpPr>
+          <p:cNvPr id="2" name="Slide Image Placeholder 1"/>
+          <p:cNvSpPr>
+            <a:spLocks noGrp="1"/>
+          </p:cNvSpPr>
+          <p:nvPr>
+            <p:ph type="sldImg" idx="2"/>
+          </p:nvPr>
+        </p:nvSpPr>
+        <p:spPr/>
+      </p:sp>
+      <p:sp>
+        <p:nvSpPr>
+          <p:cNvPr id="3" name="Notes Placeholder 2"/>
+          <p:cNvSpPr>
+            <a:spLocks noGrp="1"/>
+          </p:cNvSpPr>
+          <p:nvPr>
+            <p:ph type="body" idx="3" sz="quarter"/>
+          </p:nvPr>
+        </p:nvSpPr>
+        <p:spPr/>
+        <p:txBody>
+          <a:bodyPr/>
+          <a:lstStyle/>
+          <a:p>
+            <a:r>
+              <a:t>ANSH.</a:t>
+            </a:r>
+          </a:p>
+          <a:p>
+            <a:r>
+              <a:t>Designing a standard joint is not creative work, it is a fixed recipe. For a knuckle joint you</a:t>
+            </a:r>
+          </a:p>
+          <a:p>
+            <a:r>
+              <a:t>find the rod from tension, size the pin twice, once for shear and once for bending, take the</a:t>
+            </a:r>
+          </a:p>
+          <a:p>
+            <a:r>
+              <a:t>larger, derive seven more dimensions from the rod, then check nine ways it can fail.</a:t>
+            </a:r>
+          </a:p>
+          <a:p>
+            <a:r>
+              <a:t>Change the load and you do all of it again from the start.</a:t>
+            </a:r>
+          </a:p>
+          <a:p>
+            <a:r>
+              <a:t>The thinking is five minutes. The arithmetic is the afternoon.</a:t>
+            </a:r>
+          </a:p>
+          <a:p>
+            <a:r>
+              <a:t>CAD removed the drawing work but not this. A modeller will happily draw a pin too thin to</a:t>
+            </a:r>
+          </a:p>
+          <a:p>
+            <a:r>
+              <a:t>survive, because it does not know what a pin is.</a:t>
+            </a:r>
+          </a:p>
+          <a:p>
+            <a:r>
+              <a:t>Our aim: keep every formula exactly as the textbook has it, and remove only the repetition.</a:t>
+            </a:r>
+          </a:p>
+        </p:txBody>
+      </p:sp>
+      <p:sp>
+        <p:nvSpPr>
+          <p:cNvPr id="4" name="Slide Number Placeholder 3"/>
+          <p:cNvSpPr>
+            <a:spLocks noGrp="1"/>
+          </p:cNvSpPr>
+          <p:nvPr>
+            <p:ph type="sldNum" idx="5" sz="quarter"/>
+          </p:nvPr>
+        </p:nvSpPr>
+        <p:spPr/>
+      </p:sp>
+    </p:spTree>
+  </p:cSld>
+  <p:clrMapOvr>
+    <a:masterClrMapping/>
+  </p:clrMapOvr>
+</p:notes>
+</file>
+
+<file path=ppt/notesSlides/notesSlide4.xml><?xml version="1.0" encoding="utf-8"?>
+<p:notes xmlns:a="http://schemas.openxmlformats.org/drawingml/2006/main" xmlns:p="http://schemas.openxmlformats.org/presentationml/2006/main" xmlns:r="http://schemas.openxmlformats.org/officeDocument/2006/relationships">
+  <p:cSld>
+    <p:spTree>
+      <p:nvGrpSpPr>
+        <p:cNvPr id="1" name=""/>
+        <p:cNvGrpSpPr/>
+        <p:nvPr/>
+      </p:nvGrpSpPr>
+      <p:grpSpPr>
+        <a:xfrm>
+          <a:off x="0" y="0"/>
+          <a:ext cx="0" cy="0"/>
+          <a:chOff x="0" y="0"/>
+          <a:chExt cx="0" cy="0"/>
+        </a:xfrm>
+      </p:grpSpPr>
+      <p:sp>
+        <p:nvSpPr>
+          <p:cNvPr id="2" name="Slide Image Placeholder 1"/>
+          <p:cNvSpPr>
+            <a:spLocks noGrp="1"/>
+          </p:cNvSpPr>
+          <p:nvPr>
+            <p:ph type="sldImg" idx="2"/>
+          </p:nvPr>
+        </p:nvSpPr>
+        <p:spPr/>
+      </p:sp>
+      <p:sp>
+        <p:nvSpPr>
+          <p:cNvPr id="3" name="Notes Placeholder 2"/>
+          <p:cNvSpPr>
+            <a:spLocks noGrp="1"/>
+          </p:cNvSpPr>
+          <p:nvPr>
+            <p:ph type="body" idx="3" sz="quarter"/>
+          </p:nvPr>
+        </p:nvSpPr>
+        <p:spPr/>
+        <p:txBody>
+          <a:bodyPr/>
+          <a:lstStyle/>
+          <a:p>
+            <a:r>
+              <a:t>ANSH. Section opener. Say: these are the three books the whole project stands on.</a:t>
+            </a:r>
+          </a:p>
+        </p:txBody>
+      </p:sp>
+      <p:sp>
+        <p:nvSpPr>
+          <p:cNvPr id="4" name="Slide Number Placeholder 3"/>
+          <p:cNvSpPr>
+            <a:spLocks noGrp="1"/>
+          </p:cNvSpPr>
+          <p:nvPr>
+            <p:ph type="sldNum" idx="5" sz="quarter"/>
+          </p:nvPr>
+        </p:nvSpPr>
+        <p:spPr/>
+      </p:sp>
+    </p:spTree>
+  </p:cSld>
+  <p:clrMapOvr>
+    <a:masterClrMapping/>
+  </p:clrMapOvr>
+</p:notes>
+</file>
+
+<file path=ppt/notesSlides/notesSlide5.xml><?xml version="1.0" encoding="utf-8"?>
+<p:notes xmlns:a="http://schemas.openxmlformats.org/drawingml/2006/main" xmlns:p="http://schemas.openxmlformats.org/presentationml/2006/main" xmlns:r="http://schemas.openxmlformats.org/officeDocument/2006/relationships">
+  <p:cSld>
+    <p:spTree>
+      <p:nvGrpSpPr>
+        <p:cNvPr id="1" name=""/>
+        <p:cNvGrpSpPr/>
+        <p:nvPr/>
+      </p:nvGrpSpPr>
+      <p:grpSpPr>
+        <a:xfrm>
+          <a:off x="0" y="0"/>
+          <a:ext cx="0" cy="0"/>
+          <a:chOff x="0" y="0"/>
+          <a:chExt cx="0" cy="0"/>
+        </a:xfrm>
+      </p:grpSpPr>
+      <p:sp>
+        <p:nvSpPr>
+          <p:cNvPr id="2" name="Slide Image Placeholder 1"/>
+          <p:cNvSpPr>
+            <a:spLocks noGrp="1"/>
+          </p:cNvSpPr>
+          <p:nvPr>
+            <p:ph type="sldImg" idx="2"/>
+          </p:nvPr>
+        </p:nvSpPr>
+        <p:spPr/>
+      </p:sp>
+      <p:sp>
+        <p:nvSpPr>
+          <p:cNvPr id="3" name="Notes Placeholder 2"/>
+          <p:cNvSpPr>
+            <a:spLocks noGrp="1"/>
+          </p:cNvSpPr>
+          <p:nvPr>
+            <p:ph type="body" idx="3" sz="quarter"/>
+          </p:nvPr>
+        </p:nvSpPr>
+        <p:spPr/>
+        <p:txBody>
+          <a:bodyPr/>
+          <a:lstStyle/>
+          <a:p>
+            <a:r>
+              <a:t>ANSH.</a:t>
+            </a:r>
+          </a:p>
+          <a:p>
+            <a:r>
+              <a:t>Three sources. NPTEL from IIT Kharagpur gives the full design procedure for the cotter and</a:t>
+            </a:r>
+          </a:p>
+          <a:p>
+            <a:r>
+              <a:t>knuckle joints, the proportions and the failure modes. Unwin, 1899, gives the gib and cotter</a:t>
+            </a:r>
+          </a:p>
+          <a:p>
+            <a:r>
+              <a:t>joint, which the course does not cover. Leutwiler, 1917, lists ten ways a cotter joint fails</a:t>
+            </a:r>
+          </a:p>
+          <a:p>
+            <a:r>
+              <a:t>and analyses the flange coupling.</a:t>
+            </a:r>
+          </a:p>
+          <a:p>
+            <a:r>
+              <a:t>Two of them are out of copyright, so anyone can open them and check us.</a:t>
+            </a:r>
+          </a:p>
+          <a:p>
+            <a:r>
+              <a:t>If asked why three sources for six joints: two of them cover the same joint deliberately. That</a:t>
+            </a:r>
+          </a:p>
+          <a:p>
+            <a:r>
+              <a:t>overlap is exactly what let us find three mistakes in the books, which Dharmendra will show.</a:t>
+            </a:r>
+          </a:p>
+          <a:p>
+            <a:r>
+              <a:t>We also used SP 46 for first angle projection and the IS codes for keys, bolts and couplings.</a:t>
+            </a:r>
+          </a:p>
+        </p:txBody>
+      </p:sp>
+      <p:sp>
+        <p:nvSpPr>
+          <p:cNvPr id="4" name="Slide Number Placeholder 3"/>
+          <p:cNvSpPr>
+            <a:spLocks noGrp="1"/>
+          </p:cNvSpPr>
+          <p:nvPr>
+            <p:ph type="sldNum" idx="5" sz="quarter"/>
+          </p:nvPr>
+        </p:nvSpPr>
+        <p:spPr/>
+      </p:sp>
+    </p:spTree>
+  </p:cSld>
+  <p:clrMapOvr>
+    <a:masterClrMapping/>
+  </p:clrMapOvr>
+</p:notes>
+</file>
+
+<file path=ppt/notesSlides/notesSlide6.xml><?xml version="1.0" encoding="utf-8"?>
+<p:notes xmlns:a="http://schemas.openxmlformats.org/drawingml/2006/main" xmlns:p="http://schemas.openxmlformats.org/presentationml/2006/main" xmlns:r="http://schemas.openxmlformats.org/officeDocument/2006/relationships">
+  <p:cSld>
+    <p:spTree>
+      <p:nvGrpSpPr>
+        <p:cNvPr id="1" name=""/>
+        <p:cNvGrpSpPr/>
+        <p:nvPr/>
+      </p:nvGrpSpPr>
+      <p:grpSpPr>
+        <a:xfrm>
+          <a:off x="0" y="0"/>
+          <a:ext cx="0" cy="0"/>
+          <a:chOff x="0" y="0"/>
+          <a:chExt cx="0" cy="0"/>
+        </a:xfrm>
+      </p:grpSpPr>
+      <p:sp>
+        <p:nvSpPr>
+          <p:cNvPr id="2" name="Slide Image Placeholder 1"/>
+          <p:cNvSpPr>
+            <a:spLocks noGrp="1"/>
+          </p:cNvSpPr>
+          <p:nvPr>
+            <p:ph type="sldImg" idx="2"/>
+          </p:nvPr>
+        </p:nvSpPr>
+        <p:spPr/>
+      </p:sp>
+      <p:sp>
+        <p:nvSpPr>
+          <p:cNvPr id="3" name="Notes Placeholder 2"/>
+          <p:cNvSpPr>
+            <a:spLocks noGrp="1"/>
+          </p:cNvSpPr>
+          <p:nvPr>
+            <p:ph type="body" idx="3" sz="quarter"/>
+          </p:nvPr>
+        </p:nvSpPr>
+        <p:spPr/>
+        <p:txBody>
+          <a:bodyPr/>
+          <a:lstStyle/>
+          <a:p>
+            <a:r>
+              <a:t>ANSH.</a:t>
+            </a:r>
+          </a:p>
+          <a:p>
+            <a:r>
+              <a:t>Three existing approaches, and what each leaves open.</a:t>
+            </a:r>
+          </a:p>
+          <a:p>
+            <a:r>
+              <a:t>Parametric CAD regenerates a model when parameters change, but it does not decide the</a:t>
+            </a:r>
+          </a:p>
+          <a:p>
+            <a:r>
+              <a:t>parameters. It will regenerate an unsafe model as readily as a safe one.</a:t>
+            </a:r>
+          </a:p>
+          <a:p>
+            <a:r>
+              <a:t>Language models writing CAD code produce geometry fast, but no dimension can be traced to a</a:t>
+            </a:r>
+          </a:p>
+          <a:p>
+            <a:r>
+              <a:t>calculation and no failure mode is checked.</a:t>
+            </a:r>
+          </a:p>
+          <a:p>
+            <a:r>
+              <a:t>Expert systems are reliable but hide the calculation, so you cannot check a result against a</a:t>
+            </a:r>
+          </a:p>
+          <a:p>
+            <a:r>
+              <a:t>published source.</a:t>
+            </a:r>
+          </a:p>
+          <a:p>
+            <a:r>
+              <a:t>So the gap is not modelling and not language. It is the connection between them.</a:t>
+            </a:r>
+          </a:p>
+        </p:txBody>
+      </p:sp>
+      <p:sp>
+        <p:nvSpPr>
+          <p:cNvPr id="4" name="Slide Number Placeholder 3"/>
+          <p:cNvSpPr>
+            <a:spLocks noGrp="1"/>
+          </p:cNvSpPr>
+          <p:nvPr>
+            <p:ph type="sldNum" idx="5" sz="quarter"/>
+          </p:nvPr>
+        </p:nvSpPr>
+        <p:spPr/>
+      </p:sp>
+    </p:spTree>
+  </p:cSld>
+  <p:clrMapOvr>
+    <a:masterClrMapping/>
+  </p:clrMapOvr>
+</p:notes>
+</file>
+
+<file path=ppt/notesSlides/notesSlide7.xml><?xml version="1.0" encoding="utf-8"?>
+<p:notes xmlns:a="http://schemas.openxmlformats.org/drawingml/2006/main" xmlns:p="http://schemas.openxmlformats.org/presentationml/2006/main" xmlns:r="http://schemas.openxmlformats.org/officeDocument/2006/relationships">
+  <p:cSld>
+    <p:spTree>
+      <p:nvGrpSpPr>
+        <p:cNvPr id="1" name=""/>
+        <p:cNvGrpSpPr/>
+        <p:nvPr/>
+      </p:nvGrpSpPr>
+      <p:grpSpPr>
+        <a:xfrm>
+          <a:off x="0" y="0"/>
+          <a:ext cx="0" cy="0"/>
+          <a:chOff x="0" y="0"/>
+          <a:chExt cx="0" cy="0"/>
+        </a:xfrm>
+      </p:grpSpPr>
+      <p:sp>
+        <p:nvSpPr>
+          <p:cNvPr id="2" name="Slide Image Placeholder 1"/>
+          <p:cNvSpPr>
+            <a:spLocks noGrp="1"/>
+          </p:cNvSpPr>
+          <p:nvPr>
+            <p:ph type="sldImg" idx="2"/>
+          </p:nvPr>
+        </p:nvSpPr>
+        <p:spPr/>
+      </p:sp>
+      <p:sp>
+        <p:nvSpPr>
+          <p:cNvPr id="3" name="Notes Placeholder 2"/>
+          <p:cNvSpPr>
+            <a:spLocks noGrp="1"/>
+          </p:cNvSpPr>
+          <p:nvPr>
+            <p:ph type="body" idx="3" sz="quarter"/>
+          </p:nvPr>
+        </p:nvSpPr>
+        <p:spPr/>
+        <p:txBody>
+          <a:bodyPr/>
+          <a:lstStyle/>
+          <a:p>
+            <a:r>
+              <a:t>BHAVYA. Section opener. Say: now what we actually built.</a:t>
+            </a:r>
+          </a:p>
+        </p:txBody>
+      </p:sp>
+      <p:sp>
+        <p:nvSpPr>
+          <p:cNvPr id="4" name="Slide Number Placeholder 3"/>
+          <p:cNvSpPr>
+            <a:spLocks noGrp="1"/>
+          </p:cNvSpPr>
+          <p:nvPr>
+            <p:ph type="sldNum" idx="5" sz="quarter"/>
+          </p:nvPr>
+        </p:nvSpPr>
+        <p:spPr/>
+      </p:sp>
+    </p:spTree>
+  </p:cSld>
+  <p:clrMapOvr>
+    <a:masterClrMapping/>
+  </p:clrMapOvr>
+</p:notes>
+</file>
+
+<file path=ppt/notesSlides/notesSlide8.xml><?xml version="1.0" encoding="utf-8"?>
+<p:notes xmlns:a="http://schemas.openxmlformats.org/drawingml/2006/main" xmlns:p="http://schemas.openxmlformats.org/presentationml/2006/main" xmlns:r="http://schemas.openxmlformats.org/officeDocument/2006/relationships">
+  <p:cSld>
+    <p:spTree>
+      <p:nvGrpSpPr>
+        <p:cNvPr id="1" name=""/>
+        <p:cNvGrpSpPr/>
+        <p:nvPr/>
+      </p:nvGrpSpPr>
+      <p:grpSpPr>
+        <a:xfrm>
+          <a:off x="0" y="0"/>
+          <a:ext cx="0" cy="0"/>
+          <a:chOff x="0" y="0"/>
+          <a:chExt cx="0" cy="0"/>
+        </a:xfrm>
+      </p:grpSpPr>
+      <p:sp>
+        <p:nvSpPr>
+          <p:cNvPr id="2" name="Slide Image Placeholder 1"/>
+          <p:cNvSpPr>
+            <a:spLocks noGrp="1"/>
+          </p:cNvSpPr>
+          <p:nvPr>
+            <p:ph type="sldImg" idx="2"/>
+          </p:nvPr>
+        </p:nvSpPr>
+        <p:spPr/>
+      </p:sp>
+      <p:sp>
+        <p:nvSpPr>
+          <p:cNvPr id="3" name="Notes Placeholder 2"/>
+          <p:cNvSpPr>
+            <a:spLocks noGrp="1"/>
+          </p:cNvSpPr>
+          <p:nvPr>
+            <p:ph type="body" idx="3" sz="quarter"/>
+          </p:nvPr>
+        </p:nvSpPr>
+        <p:spPr/>
+        <p:txBody>
+          <a:bodyPr/>
+          <a:lstStyle/>
+          <a:p>
+            <a:r>
+              <a:t>BHAVYA.</a:t>
+            </a:r>
+          </a:p>
+          <a:p>
+            <a:r>
+              <a:t>Five stages. It reads the sentence into parameters. It sizes the joint starting from the</a:t>
+            </a:r>
+          </a:p>
+          <a:p>
+            <a:r>
+              <a:t>governing formula, then rounds up to a standard size as the book directs. It checks every</a:t>
+            </a:r>
+          </a:p>
+          <a:p>
+            <a:r>
+              <a:t>failure mode against the allowable stress, and where one fails it grows that dimension a</a:t>
+            </a:r>
+          </a:p>
+          <a:p>
+            <a:r>
+              <a:t>millimetre at a time until it passes. It builds each part as an exact solid. It draws the sheet.</a:t>
+            </a:r>
+          </a:p>
+          <a:p>
+            <a:r>
+              <a:t>Design rules are stored as data, not code, which is why the software can tell you the source of</a:t>
+            </a:r>
+          </a:p>
+          <a:p>
+            <a:r>
+              <a:t>any dimension at the moment it computes it.</a:t>
+            </a:r>
+          </a:p>
+        </p:txBody>
+      </p:sp>
+      <p:sp>
+        <p:nvSpPr>
+          <p:cNvPr id="4" name="Slide Number Placeholder 3"/>
+          <p:cNvSpPr>
+            <a:spLocks noGrp="1"/>
+          </p:cNvSpPr>
+          <p:nvPr>
+            <p:ph type="sldNum" idx="5" sz="quarter"/>
+          </p:nvPr>
+        </p:nvSpPr>
+        <p:spPr/>
+      </p:sp>
+    </p:spTree>
+  </p:cSld>
+  <p:clrMapOvr>
+    <a:masterClrMapping/>
+  </p:clrMapOvr>
+</p:notes>
+</file>
+
+<file path=ppt/notesSlides/notesSlide9.xml><?xml version="1.0" encoding="utf-8"?>
+<p:notes xmlns:a="http://schemas.openxmlformats.org/drawingml/2006/main" xmlns:p="http://schemas.openxmlformats.org/presentationml/2006/main" xmlns:r="http://schemas.openxmlformats.org/officeDocument/2006/relationships">
+  <p:cSld>
+    <p:spTree>
+      <p:nvGrpSpPr>
+        <p:cNvPr id="1" name=""/>
+        <p:cNvGrpSpPr/>
+        <p:nvPr/>
+      </p:nvGrpSpPr>
+      <p:grpSpPr>
+        <a:xfrm>
+          <a:off x="0" y="0"/>
+          <a:ext cx="0" cy="0"/>
+          <a:chOff x="0" y="0"/>
+          <a:chExt cx="0" cy="0"/>
+        </a:xfrm>
+      </p:grpSpPr>
+      <p:sp>
+        <p:nvSpPr>
+          <p:cNvPr id="2" name="Slide Image Placeholder 1"/>
+          <p:cNvSpPr>
+            <a:spLocks noGrp="1"/>
+          </p:cNvSpPr>
+          <p:nvPr>
+            <p:ph type="sldImg" idx="2"/>
+          </p:nvPr>
+        </p:nvSpPr>
+        <p:spPr/>
+      </p:sp>
+      <p:sp>
+        <p:nvSpPr>
+          <p:cNvPr id="3" name="Notes Placeholder 2"/>
+          <p:cNvSpPr>
+            <a:spLocks noGrp="1"/>
+          </p:cNvSpPr>
+          <p:nvPr>
+            <p:ph type="body" idx="3" sz="quarter"/>
+          </p:nvPr>
+        </p:nvSpPr>
+        <p:spPr/>
+        <p:txBody>
+          <a:bodyPr/>
+          <a:lstStyle/>
+          <a:p>
+            <a:r>
+              <a:t>BHAVYA.</a:t>
+            </a:r>
+          </a:p>
+          <a:p>
+            <a:r>
+              <a:t>This is the most important slide in the deck.</a:t>
+            </a:r>
+          </a:p>
+          <a:p>
+            <a:r>
+              <a:t>The AI only reads the sentence. It never picks a dimension and never performs a check.</a:t>
+            </a:r>
+          </a:p>
+          <a:p>
+            <a:r>
+              <a:t>Reading "50 kN" as 50,000 newtons is a language problem, and that is what a language model is</a:t>
+            </a:r>
+          </a:p>
+          <a:p>
+            <a:r>
+              <a:t>good at. Choosing the pin diameter is an engineering problem with one correct answer from a</a:t>
+            </a:r>
+          </a:p>
+          <a:p>
+            <a:r>
+              <a:t>formula, so that stays with ordinary deterministic code traceable to a page in a book.</a:t>
+            </a:r>
+          </a:p>
+          <a:p>
+            <a:r>
+              <a:t>There is also a safeguard: any number the model returns that was not in the original sentence is</a:t>
+            </a:r>
+          </a:p>
+          <a:p>
+            <a:r>
+              <a:t>thrown away and the user is told.</a:t>
+            </a:r>
+          </a:p>
+          <a:p>
+            <a:r>
+              <a:t>If asked why not let AI generate the whole model: because then no number could be checked</a:t>
+            </a:r>
+          </a:p>
+          <a:p>
+            <a:r>
+              <a:t>against anything, and geometry you cannot justify is useless in a design review.</a:t>
+            </a:r>
+          </a:p>
+        </p:txBody>
+      </p:sp>
+      <p:sp>
+        <p:nvSpPr>
+          <p:cNvPr id="4" name="Slide Number Placeholder 3"/>
+          <p:cNvSpPr>
+            <a:spLocks noGrp="1"/>
+          </p:cNvSpPr>
+          <p:nvPr>
+            <p:ph type="sldNum" idx="5" sz="quarter"/>
+          </p:nvPr>
+        </p:nvSpPr>
+        <p:spPr/>
+      </p:sp>
+    </p:spTree>
+  </p:cSld>
+  <p:clrMapOvr>
+    <a:masterClrMapping/>
+  </p:clrMapOvr>
+</p:notes>
 </file>
 
 <file path=ppt/slideLayouts/slideLayout1.xml><?xml version="1.0" encoding="utf-8"?>
@@ -4513,4 +7373,324 @@
   </a:objectDefaults>
   <a:extraClrSchemeLst/>
 </a:theme>
+</file>
+
+<file path=ppt/theme/theme2.xml><?xml version="1.0" encoding="utf-8"?>
+<a:theme xmlns:a="http://schemas.openxmlformats.org/drawingml/2006/main" name="Office Theme">
+  <a:themeElements>
+    <a:clrScheme name="Office">
+      <a:dk1>
+        <a:sysClr val="windowText" lastClr="000000"/>
+      </a:dk1>
+      <a:lt1>
+        <a:sysClr val="window" lastClr="FFFFFF"/>
+      </a:lt1>
+      <a:dk2>
+        <a:srgbClr val="1F497D"/>
+      </a:dk2>
+      <a:lt2>
+        <a:srgbClr val="EEECE1"/>
+      </a:lt2>
+      <a:accent1>
+        <a:srgbClr val="4F81BD"/>
+      </a:accent1>
+      <a:accent2>
+        <a:srgbClr val="C0504D"/>
+      </a:accent2>
+      <a:accent3>
+        <a:srgbClr val="9BBB59"/>
+      </a:accent3>
+      <a:accent4>
+        <a:srgbClr val="8064A2"/>
+      </a:accent4>
+      <a:accent5>
+        <a:srgbClr val="4BACC6"/>
+      </a:accent5>
+      <a:accent6>
+        <a:srgbClr val="F79646"/>
+      </a:accent6>
+      <a:hlink>
+        <a:srgbClr val="0000FF"/>
+      </a:hlink>
+      <a:folHlink>
+        <a:srgbClr val="800080"/>
+      </a:folHlink>
+    </a:clrScheme>
+    <a:fontScheme name="Office">
+      <a:majorFont>
+        <a:latin typeface="Calibri"/>
+        <a:ea typeface=""/>
+        <a:cs typeface=""/>
+        <a:font script="Jpan" typeface="ＭＳ Ｐゴシック"/>
+        <a:font script="Hang" typeface="맑은 고딕"/>
+        <a:font script="Hans" typeface="宋体"/>
+        <a:font script="Hant" typeface="新細明體"/>
+        <a:font script="Arab" typeface="Times New Roman"/>
+        <a:font script="Hebr" typeface="Times New Roman"/>
+        <a:font script="Thai" typeface="Angsana New"/>
+        <a:font script="Ethi" typeface="Nyala"/>
+        <a:font script="Beng" typeface="Vrinda"/>
+        <a:font script="Gujr" typeface="Shruti"/>
+        <a:font script="Khmr" typeface="MoolBoran"/>
+        <a:font script="Knda" typeface="Tunga"/>
+        <a:font script="Guru" typeface="Raavi"/>
+        <a:font script="Cans" typeface="Euphemia"/>
+        <a:font script="Cher" typeface="Plantagenet Cherokee"/>
+        <a:font script="Yiii" typeface="Microsoft Yi Baiti"/>
+        <a:font script="Tibt" typeface="Microsoft Himalaya"/>
+        <a:font script="Thaa" typeface="MV Boli"/>
+        <a:font script="Deva" typeface="Mangal"/>
+        <a:font script="Telu" typeface="Gautami"/>
+        <a:font script="Taml" typeface="Latha"/>
+        <a:font script="Syrc" typeface="Estrangelo Edessa"/>
+        <a:font script="Orya" typeface="Kalinga"/>
+        <a:font script="Mlym" typeface="Kartika"/>
+        <a:font script="Laoo" typeface="DokChampa"/>
+        <a:font script="Sinh" typeface="Iskoola Pota"/>
+        <a:font script="Mong" typeface="Mongolian Baiti"/>
+        <a:font script="Viet" typeface="Times New Roman"/>
+        <a:font script="Uigh" typeface="Microsoft Uighur"/>
+        <a:font script="Geor" typeface="Sylfaen"/>
+      </a:majorFont>
+      <a:minorFont>
+        <a:latin typeface="Calibri"/>
+        <a:ea typeface=""/>
+        <a:cs typeface=""/>
+        <a:font script="Jpan" typeface="ＭＳ Ｐゴシック"/>
+        <a:font script="Hang" typeface="맑은 고딕"/>
+        <a:font script="Hans" typeface="宋体"/>
+        <a:font script="Hant" typeface="新細明體"/>
+        <a:font script="Arab" typeface="Arial"/>
+        <a:font script="Hebr" typeface="Arial"/>
+        <a:font script="Thai" typeface="Cordia New"/>
+        <a:font script="Ethi" typeface="Nyala"/>
+        <a:font script="Beng" typeface="Vrinda"/>
+        <a:font script="Gujr" typeface="Shruti"/>
+        <a:font script="Khmr" typeface="DaunPenh"/>
+        <a:font script="Knda" typeface="Tunga"/>
+        <a:font script="Guru" typeface="Raavi"/>
+        <a:font script="Cans" typeface="Euphemia"/>
+        <a:font script="Cher" typeface="Plantagenet Cherokee"/>
+        <a:font script="Yiii" typeface="Microsoft Yi Baiti"/>
+        <a:font script="Tibt" typeface="Microsoft Himalaya"/>
+        <a:font script="Thaa" typeface="MV Boli"/>
+        <a:font script="Deva" typeface="Mangal"/>
+        <a:font script="Telu" typeface="Gautami"/>
+        <a:font script="Taml" typeface="Latha"/>
+        <a:font script="Syrc" typeface="Estrangelo Edessa"/>
+        <a:font script="Orya" typeface="Kalinga"/>
+        <a:font script="Mlym" typeface="Kartika"/>
+        <a:font script="Laoo" typeface="DokChampa"/>
+        <a:font script="Sinh" typeface="Iskoola Pota"/>
+        <a:font script="Mong" typeface="Mongolian Baiti"/>
+        <a:font script="Viet" typeface="Arial"/>
+        <a:font script="Uigh" typeface="Microsoft Uighur"/>
+        <a:font script="Geor" typeface="Sylfaen"/>
+      </a:minorFont>
+    </a:fontScheme>
+    <a:fmtScheme name="Office">
+      <a:fillStyleLst>
+        <a:solidFill>
+          <a:schemeClr val="phClr"/>
+        </a:solidFill>
+        <a:gradFill rotWithShape="1">
+          <a:gsLst>
+            <a:gs pos="0">
+              <a:schemeClr val="phClr">
+                <a:tint val="50000"/>
+                <a:satMod val="300000"/>
+              </a:schemeClr>
+            </a:gs>
+            <a:gs pos="35000">
+              <a:schemeClr val="phClr">
+                <a:tint val="37000"/>
+                <a:satMod val="300000"/>
+              </a:schemeClr>
+            </a:gs>
+            <a:gs pos="100000">
+              <a:schemeClr val="phClr">
+                <a:tint val="15000"/>
+                <a:satMod val="350000"/>
+              </a:schemeClr>
+            </a:gs>
+          </a:gsLst>
+          <a:lin ang="16200000" scaled="1"/>
+        </a:gradFill>
+        <a:gradFill rotWithShape="1">
+          <a:gsLst>
+            <a:gs pos="0">
+              <a:schemeClr val="phClr">
+                <a:tint val="100000"/>
+                <a:shade val="100000"/>
+                <a:satMod val="130000"/>
+              </a:schemeClr>
+            </a:gs>
+            <a:gs pos="100000">
+              <a:schemeClr val="phClr">
+                <a:tint val="50000"/>
+                <a:shade val="100000"/>
+                <a:satMod val="350000"/>
+              </a:schemeClr>
+            </a:gs>
+          </a:gsLst>
+          <a:lin ang="16200000" scaled="0"/>
+        </a:gradFill>
+      </a:fillStyleLst>
+      <a:lnStyleLst>
+        <a:ln w="9525" cap="flat" cmpd="sng" algn="ctr">
+          <a:solidFill>
+            <a:schemeClr val="phClr">
+              <a:shade val="95000"/>
+              <a:satMod val="105000"/>
+            </a:schemeClr>
+          </a:solidFill>
+          <a:prstDash val="solid"/>
+        </a:ln>
+        <a:ln w="25400" cap="flat" cmpd="sng" algn="ctr">
+          <a:solidFill>
+            <a:schemeClr val="phClr"/>
+          </a:solidFill>
+          <a:prstDash val="solid"/>
+        </a:ln>
+        <a:ln w="38100" cap="flat" cmpd="sng" algn="ctr">
+          <a:solidFill>
+            <a:schemeClr val="phClr"/>
+          </a:solidFill>
+          <a:prstDash val="solid"/>
+        </a:ln>
+      </a:lnStyleLst>
+      <a:effectStyleLst>
+        <a:effectStyle>
+          <a:effectLst>
+            <a:outerShdw blurRad="40000" dist="20000" dir="5400000" rotWithShape="0">
+              <a:srgbClr val="000000">
+                <a:alpha val="38000"/>
+              </a:srgbClr>
+            </a:outerShdw>
+          </a:effectLst>
+        </a:effectStyle>
+        <a:effectStyle>
+          <a:effectLst>
+            <a:outerShdw blurRad="40000" dist="23000" dir="5400000" rotWithShape="0">
+              <a:srgbClr val="000000">
+                <a:alpha val="35000"/>
+              </a:srgbClr>
+            </a:outerShdw>
+          </a:effectLst>
+        </a:effectStyle>
+        <a:effectStyle>
+          <a:effectLst>
+            <a:outerShdw blurRad="40000" dist="23000" dir="5400000" rotWithShape="0">
+              <a:srgbClr val="000000">
+                <a:alpha val="35000"/>
+              </a:srgbClr>
+            </a:outerShdw>
+          </a:effectLst>
+          <a:scene3d>
+            <a:camera prst="orthographicFront">
+              <a:rot lat="0" lon="0" rev="0"/>
+            </a:camera>
+            <a:lightRig rig="threePt" dir="t">
+              <a:rot lat="0" lon="0" rev="1200000"/>
+            </a:lightRig>
+          </a:scene3d>
+          <a:sp3d>
+            <a:bevelT w="63500" h="25400"/>
+          </a:sp3d>
+        </a:effectStyle>
+      </a:effectStyleLst>
+      <a:bgFillStyleLst>
+        <a:solidFill>
+          <a:schemeClr val="phClr"/>
+        </a:solidFill>
+        <a:gradFill rotWithShape="1">
+          <a:gsLst>
+            <a:gs pos="0">
+              <a:schemeClr val="phClr">
+                <a:tint val="40000"/>
+                <a:satMod val="350000"/>
+              </a:schemeClr>
+            </a:gs>
+            <a:gs pos="40000">
+              <a:schemeClr val="phClr">
+                <a:tint val="45000"/>
+                <a:shade val="99000"/>
+                <a:satMod val="350000"/>
+              </a:schemeClr>
+            </a:gs>
+            <a:gs pos="100000">
+              <a:schemeClr val="phClr">
+                <a:shade val="20000"/>
+                <a:satMod val="255000"/>
+              </a:schemeClr>
+            </a:gs>
+          </a:gsLst>
+          <a:path path="circle">
+            <a:fillToRect l="50000" t="-80000" r="50000" b="180000"/>
+          </a:path>
+        </a:gradFill>
+        <a:gradFill rotWithShape="1">
+          <a:gsLst>
+            <a:gs pos="0">
+              <a:schemeClr val="phClr">
+                <a:tint val="80000"/>
+                <a:satMod val="300000"/>
+              </a:schemeClr>
+            </a:gs>
+            <a:gs pos="100000">
+              <a:schemeClr val="phClr">
+                <a:shade val="30000"/>
+                <a:satMod val="200000"/>
+              </a:schemeClr>
+            </a:gs>
+          </a:gsLst>
+          <a:path path="circle">
+            <a:fillToRect l="50000" t="50000" r="50000" b="50000"/>
+          </a:path>
+        </a:gradFill>
+      </a:bgFillStyleLst>
+    </a:fmtScheme>
+  </a:themeElements>
+  <a:objectDefaults>
+    <a:spDef>
+      <a:spPr/>
+      <a:bodyPr/>
+      <a:lstStyle/>
+      <a:style>
+        <a:lnRef idx="1">
+          <a:schemeClr val="accent1"/>
+        </a:lnRef>
+        <a:fillRef idx="3">
+          <a:schemeClr val="accent1"/>
+        </a:fillRef>
+        <a:effectRef idx="2">
+          <a:schemeClr val="accent1"/>
+        </a:effectRef>
+        <a:fontRef idx="minor">
+          <a:schemeClr val="lt1"/>
+        </a:fontRef>
+      </a:style>
+    </a:spDef>
+    <a:lnDef>
+      <a:spPr/>
+      <a:bodyPr/>
+      <a:lstStyle/>
+      <a:style>
+        <a:lnRef idx="2">
+          <a:schemeClr val="accent1"/>
+        </a:lnRef>
+        <a:fillRef idx="0">
+          <a:schemeClr val="accent1"/>
+        </a:fillRef>
+        <a:effectRef idx="1">
+          <a:schemeClr val="accent1"/>
+        </a:effectRef>
+        <a:fontRef idx="minor">
+          <a:schemeClr val="tx1"/>
+        </a:fontRef>
+      </a:style>
+    </a:lnDef>
+  </a:objectDefaults>
+  <a:extraClrSchemeLst/>
+</a:theme>
 </file>
--- a/report/AI-in-CAD-Major-Project-Presentation.pptx
+++ b/report/AI-in-CAD-Major-Project-Presentation.pptx
@@ -31,6 +31,9 @@
     <p:sldId id="279" r:id="rId31"/>
     <p:sldId id="280" r:id="rId32"/>
     <p:sldId id="281" r:id="rId33"/>
+    <p:sldId id="282" r:id="rId34"/>
+    <p:sldId id="283" r:id="rId35"/>
+    <p:sldId id="284" r:id="rId36"/>
   </p:sldIdLst>
   <p:sldSz cx="12191695" cy="6858000" type="screen4x3"/>
   <p:notesSz cx="6858000" cy="9144000"/>
@@ -1210,6 +1213,11 @@
               <a:t>STEP is a neutral format, so the output is not locked to our software.</a:t>
             </a:r>
           </a:p>
+          <a:p>
+            <a:r>
+              <a:t>Next slide shows exactly what that NX claim rests on.</a:t>
+            </a:r>
+          </a:p>
         </p:txBody>
       </p:sp>
       <p:sp>
@@ -1282,22 +1290,52 @@
           </a:p>
           <a:p>
             <a:r>
-              <a:t>The assembled model, which rotates in the browser, and the same joint coloured by how close each</a:t>
-            </a:r>
-          </a:p>
-          <a:p>
-            <a:r>
-              <a:t>part is to its limit.</a:t>
-            </a:r>
-          </a:p>
-          <a:p>
-            <a:r>
-              <a:t>The colouring is useful because it puts the weakest member in front of you without reading a</a:t>
-            </a:r>
-          </a:p>
-          <a:p>
-            <a:r>
-              <a:t>table.</a:t>
+              <a:t>One of our stated objectives is that the output opens in commercial CAD, specifically NX10,</a:t>
+            </a:r>
+          </a:p>
+          <a:p>
+            <a:r>
+              <a:t>since that is what we are taught on in the lab. Here is what we actually checked, not what we</a:t>
+            </a:r>
+          </a:p>
+          <a:p>
+            <a:r>
+              <a:t>assumed.</a:t>
+            </a:r>
+          </a:p>
+          <a:p>
+            <a:r>
+              <a:t>We opened the exported file as text and read it directly. The schema line reads AUTOMOTIVE</a:t>
+            </a:r>
+          </a:p>
+          <a:p>
+            <a:r>
+              <a:t>DESIGN, AP214, which is the exact STEP format NX10 reads natively. Inside it, four separate</a:t>
+            </a:r>
+          </a:p>
+          <a:p>
+            <a:r>
+              <a:t>named parts, rod, strap, cotter, gib, each its own solid, not fused into one body. That is the</a:t>
+            </a:r>
+          </a:p>
+          <a:p>
+            <a:r>
+              <a:t>structure an assembly import needs.</a:t>
+            </a:r>
+          </a:p>
+          <a:p>
+            <a:r>
+              <a:t>We are saying this plainly: opening it inside NX10 itself still needs a lab machine, which</a:t>
+            </a:r>
+          </a:p>
+          <a:p>
+            <a:r>
+              <a:t>none of us has done yet. If asked, say exactly that, do not claim it was opened when it was not.</a:t>
+            </a:r>
+          </a:p>
+          <a:p>
+            <a:r>
+              <a:t>We verified the file is built correctly; we have not yet watched NX10 read it.</a:t>
             </a:r>
           </a:p>
         </p:txBody>
@@ -1367,7 +1405,27 @@
           <a:lstStyle/>
           <a:p>
             <a:r>
-              <a:t>DHARMENDRA. Section opener. Say: now, how do we know any of this is correct.</a:t>
+              <a:t>ATISHAY.</a:t>
+            </a:r>
+          </a:p>
+          <a:p>
+            <a:r>
+              <a:t>The assembled model, which rotates in the browser, and the same joint coloured by how close each</a:t>
+            </a:r>
+          </a:p>
+          <a:p>
+            <a:r>
+              <a:t>part is to its limit.</a:t>
+            </a:r>
+          </a:p>
+          <a:p>
+            <a:r>
+              <a:t>The colouring is useful because it puts the weakest member in front of you without reading a</a:t>
+            </a:r>
+          </a:p>
+          <a:p>
+            <a:r>
+              <a:t>table.</a:t>
             </a:r>
           </a:p>
         </p:txBody>
@@ -1437,52 +1495,7 @@
           <a:lstStyle/>
           <a:p>
             <a:r>
-              <a:t>DHARMENDRA.</a:t>
-            </a:r>
-          </a:p>
-          <a:p>
-            <a:r>
-              <a:t>Every proportion and every check was compared against the three sources.</a:t>
-            </a:r>
-          </a:p>
-          <a:p>
-            <a:r>
-              <a:t>Knuckle and cotter are fully verified. The cotter joint is verified twice over, against two</a:t>
-            </a:r>
-          </a:p>
-          <a:p>
-            <a:r>
-              <a:t>independent books.</a:t>
-            </a:r>
-          </a:p>
-          <a:p>
-            <a:r>
-              <a:t>Two entries are honest limitations rather than gaps. For the flange coupling all seven checks</a:t>
-            </a:r>
-          </a:p>
-          <a:p>
-            <a:r>
-              <a:t>are verified twice, but the proportions cannot be verified, because Leutwiler records that no</a:t>
-            </a:r>
-          </a:p>
-          <a:p>
-            <a:r>
-              <a:t>standard set of flange coupling proportions was ever agreed and that published tables are</a:t>
-            </a:r>
-          </a:p>
-          <a:p>
-            <a:r>
-              <a:t>individual manufacturers' practice. For the sleeve and cotter joint we searched four books and</a:t>
-            </a:r>
-          </a:p>
-          <a:p>
-            <a:r>
-              <a:t>none covers it by name.</a:t>
-            </a:r>
-          </a:p>
-          <a:p>
-            <a:r>
-              <a:t>Where no source exists, the software says so on every single run rather than implying one.</a:t>
+              <a:t>DHARMENDRA. Section opener. Say: now, how do we know any of this is correct.</a:t>
             </a:r>
           </a:p>
         </p:txBody>
@@ -1627,37 +1640,47 @@
           </a:p>
           <a:p>
             <a:r>
-              <a:t>The first of three errors we found in the published sources.</a:t>
-            </a:r>
-          </a:p>
-          <a:p>
-            <a:r>
-              <a:t>The knuckle worked problem raises the pin from 40 to 55 millimetres to satisfy bending, then</a:t>
-            </a:r>
-          </a:p>
-          <a:p>
-            <a:r>
-              <a:t>checks the eye using the original 40 millimetre pin.</a:t>
-            </a:r>
-          </a:p>
-          <a:p>
-            <a:r>
-              <a:t>Put the pin it actually adopted into its own expression and you get 80 MPa against an allowable</a:t>
-            </a:r>
-          </a:p>
-          <a:p>
-            <a:r>
-              <a:t>of 65. Its own answer fails its own check by 23 percent.</a:t>
-            </a:r>
-          </a:p>
-          <a:p>
-            <a:r>
-              <a:t>Our software instead enlarges the outer diameter of the eye until the check passes, and reports</a:t>
-            </a:r>
-          </a:p>
-          <a:p>
-            <a:r>
-              <a:t>that it has done so.</a:t>
+              <a:t>Every proportion and every check was compared against the three sources.</a:t>
+            </a:r>
+          </a:p>
+          <a:p>
+            <a:r>
+              <a:t>Knuckle and cotter are fully verified. The cotter joint is verified twice over, against two</a:t>
+            </a:r>
+          </a:p>
+          <a:p>
+            <a:r>
+              <a:t>independent books.</a:t>
+            </a:r>
+          </a:p>
+          <a:p>
+            <a:r>
+              <a:t>Two entries are honest limitations rather than gaps. For the flange coupling all seven checks</a:t>
+            </a:r>
+          </a:p>
+          <a:p>
+            <a:r>
+              <a:t>are verified twice, but the proportions cannot be verified, because Leutwiler records that no</a:t>
+            </a:r>
+          </a:p>
+          <a:p>
+            <a:r>
+              <a:t>standard set of flange coupling proportions was ever agreed and that published tables are</a:t>
+            </a:r>
+          </a:p>
+          <a:p>
+            <a:r>
+              <a:t>individual manufacturers' practice. For the sleeve and cotter joint we searched four books and</a:t>
+            </a:r>
+          </a:p>
+          <a:p>
+            <a:r>
+              <a:t>none covers it by name.</a:t>
+            </a:r>
+          </a:p>
+          <a:p>
+            <a:r>
+              <a:t>Where no source exists, the software says so on every single run rather than implying one.</a:t>
             </a:r>
           </a:p>
         </p:txBody>
@@ -1732,47 +1755,37 @@
           </a:p>
           <a:p>
             <a:r>
-              <a:t>Two more.</a:t>
-            </a:r>
-          </a:p>
-          <a:p>
-            <a:r>
-              <a:t>The cotter procedure checks crushing of the socket but never crushing between the cotter and the</a:t>
-            </a:r>
-          </a:p>
-          <a:p>
-            <a:r>
-              <a:t>spigot. At its own final answer that omitted check reads 167 MPa against 110 allowed. Leutwiler</a:t>
-            </a:r>
-          </a:p>
-          <a:p>
-            <a:r>
-              <a:t>lists it as one of ten failure modes, which is what makes it an omission and not a preference.</a:t>
-            </a:r>
-          </a:p>
-          <a:p>
-            <a:r>
-              <a:t>Second, the bolt tightening constant is printed as 284 d kilonewtons, but the worked example on</a:t>
-            </a:r>
-          </a:p>
-          <a:p>
-            <a:r>
-              <a:t>the same page gives 56.8 kN for an M20 bolt. That only works if the constant is 2840 d newtons.</a:t>
-            </a:r>
-          </a:p>
-          <a:p>
-            <a:r>
-              <a:t>The page refutes itself, and it is out by a factor of ten.</a:t>
-            </a:r>
-          </a:p>
-          <a:p>
-            <a:r>
-              <a:t>We found none of these by reading. We found them because the software computes every check and</a:t>
-            </a:r>
-          </a:p>
-          <a:p>
-            <a:r>
-              <a:t>prints the arithmetic.</a:t>
+              <a:t>The first of three errors we found in the published sources.</a:t>
+            </a:r>
+          </a:p>
+          <a:p>
+            <a:r>
+              <a:t>The knuckle worked problem raises the pin from 40 to 55 millimetres to satisfy bending, then</a:t>
+            </a:r>
+          </a:p>
+          <a:p>
+            <a:r>
+              <a:t>checks the eye using the original 40 millimetre pin.</a:t>
+            </a:r>
+          </a:p>
+          <a:p>
+            <a:r>
+              <a:t>Put the pin it actually adopted into its own expression and you get 80 MPa against an allowable</a:t>
+            </a:r>
+          </a:p>
+          <a:p>
+            <a:r>
+              <a:t>of 65. Its own answer fails its own check by 23 percent.</a:t>
+            </a:r>
+          </a:p>
+          <a:p>
+            <a:r>
+              <a:t>Our software instead enlarges the outer diameter of the eye until the check passes, and reports</a:t>
+            </a:r>
+          </a:p>
+          <a:p>
+            <a:r>
+              <a:t>that it has done so.</a:t>
             </a:r>
           </a:p>
         </p:txBody>
@@ -1842,7 +1855,52 @@
           <a:lstStyle/>
           <a:p>
             <a:r>
-              <a:t>ANKUR. Section opener. Say: finally, how the work is validated and what it does not do.</a:t>
+              <a:t>DHARMENDRA.</a:t>
+            </a:r>
+          </a:p>
+          <a:p>
+            <a:r>
+              <a:t>Two more.</a:t>
+            </a:r>
+          </a:p>
+          <a:p>
+            <a:r>
+              <a:t>The cotter procedure checks crushing of the socket but never crushing between the cotter and the</a:t>
+            </a:r>
+          </a:p>
+          <a:p>
+            <a:r>
+              <a:t>spigot. At its own final answer that omitted check reads 167 MPa against 110 allowed. Leutwiler</a:t>
+            </a:r>
+          </a:p>
+          <a:p>
+            <a:r>
+              <a:t>lists it as one of ten failure modes, which is what makes it an omission and not a preference.</a:t>
+            </a:r>
+          </a:p>
+          <a:p>
+            <a:r>
+              <a:t>Second, the bolt tightening constant is printed as 284 d kilonewtons, but the worked example on</a:t>
+            </a:r>
+          </a:p>
+          <a:p>
+            <a:r>
+              <a:t>the same page gives 56.8 kN for an M20 bolt. That only works if the constant is 2840 d newtons.</a:t>
+            </a:r>
+          </a:p>
+          <a:p>
+            <a:r>
+              <a:t>The page refutes itself, and it is out by a factor of ten.</a:t>
+            </a:r>
+          </a:p>
+          <a:p>
+            <a:r>
+              <a:t>We found none of these by reading. We found them because the software computes every check and</a:t>
+            </a:r>
+          </a:p>
+          <a:p>
+            <a:r>
+              <a:t>prints the arithmetic.</a:t>
             </a:r>
           </a:p>
         </p:txBody>
@@ -1912,57 +1970,7 @@
           <a:lstStyle/>
           <a:p>
             <a:r>
-              <a:t>ANKUR.</a:t>
-            </a:r>
-          </a:p>
-          <a:p>
-            <a:r>
-              <a:t>An independent finite element cross check.</a:t>
-            </a:r>
-          </a:p>
-          <a:p>
-            <a:r>
-              <a:t>First validated on a case with a known answer: a 20 mm bar in tension, formula 31.83, computed</a:t>
-            </a:r>
-          </a:p>
-          <a:p>
-            <a:r>
-              <a:t>32.22, a difference of 1.2 percent.</a:t>
-            </a:r>
-          </a:p>
-          <a:p>
-            <a:r>
-              <a:t>On the knuckle eye rod: formula 52.0, computed 57.9, about 11.5 percent higher. That is expected,</a:t>
-            </a:r>
-          </a:p>
-          <a:p>
-            <a:r>
-              <a:t>because the formula treats the rod as a plain bar and ignores the stress raised at the pin bore.</a:t>
-            </a:r>
-          </a:p>
-          <a:p>
-            <a:r>
-              <a:t>Both stay under the 75 MPa allowable.</a:t>
-            </a:r>
-          </a:p>
-          <a:p>
-            <a:r>
-              <a:t>The important part: a peak that never settles is not a stress. On one part the computed peak</a:t>
-            </a:r>
-          </a:p>
-          <a:p>
-            <a:r>
-              <a:t>moved between 157 and 191 MPa as we refined the mesh sixteen fold. So the software re-solves on</a:t>
-            </a:r>
-          </a:p>
-          <a:p>
-            <a:r>
-              <a:t>a finer mesh and reports NOT CONVERGED when the number will not settle, and tells you to design</a:t>
-            </a:r>
-          </a:p>
-          <a:p>
-            <a:r>
-              <a:t>to the hand calculation.</a:t>
+              <a:t>ANKUR. Section opener. Say: finally, how the work is validated and what it does not do.</a:t>
             </a:r>
           </a:p>
         </p:txBody>
@@ -2037,42 +2045,52 @@
           </a:p>
           <a:p>
             <a:r>
-              <a:t>290 automated tests run on every change: the arithmetic, the geometry, the parsing, the drawing</a:t>
-            </a:r>
-          </a:p>
-          <a:p>
-            <a:r>
-              <a:t>and the analysis.</a:t>
-            </a:r>
-          </a:p>
-          <a:p>
-            <a:r>
-              <a:t>The row that matters most is the last one. There are tests that assert the three errors in the</a:t>
-            </a:r>
-          </a:p>
-          <a:p>
-            <a:r>
-              <a:t>books are real. Without them, someone could later correct our software back to the printed</a:t>
-            </a:r>
-          </a:p>
-          <a:p>
-            <a:r>
-              <a:t>answers and every other test would still pass.</a:t>
-            </a:r>
-          </a:p>
-          <a:p>
-            <a:r>
-              <a:t>One test found something no dimension check could: comparing the solids pairwise caught a gib</a:t>
-            </a:r>
-          </a:p>
-          <a:p>
-            <a:r>
-              <a:t>hook modelled 1.25 millimetres inside the strap, occupying metal another part already occupied,</a:t>
-            </a:r>
-          </a:p>
-          <a:p>
-            <a:r>
-              <a:t>while every individual dimension was correct.</a:t>
+              <a:t>An independent finite element cross check.</a:t>
+            </a:r>
+          </a:p>
+          <a:p>
+            <a:r>
+              <a:t>First validated on a case with a known answer: a 20 mm bar in tension, formula 31.83, computed</a:t>
+            </a:r>
+          </a:p>
+          <a:p>
+            <a:r>
+              <a:t>32.22, a difference of 1.2 percent.</a:t>
+            </a:r>
+          </a:p>
+          <a:p>
+            <a:r>
+              <a:t>On the knuckle eye rod: formula 52.0, computed 57.9, about 11.5 percent higher. That is expected,</a:t>
+            </a:r>
+          </a:p>
+          <a:p>
+            <a:r>
+              <a:t>because the formula treats the rod as a plain bar and ignores the stress raised at the pin bore.</a:t>
+            </a:r>
+          </a:p>
+          <a:p>
+            <a:r>
+              <a:t>Both stay under the 75 MPa allowable.</a:t>
+            </a:r>
+          </a:p>
+          <a:p>
+            <a:r>
+              <a:t>The important part: a peak that never settles is not a stress. On one part the computed peak</a:t>
+            </a:r>
+          </a:p>
+          <a:p>
+            <a:r>
+              <a:t>moved between 157 and 191 MPa as we refined the mesh sixteen fold. So the software re-solves on</a:t>
+            </a:r>
+          </a:p>
+          <a:p>
+            <a:r>
+              <a:t>a finer mesh and reports NOT CONVERGED when the number will not settle, and tells you to design</a:t>
+            </a:r>
+          </a:p>
+          <a:p>
+            <a:r>
+              <a:t>to the hand calculation.</a:t>
             </a:r>
           </a:p>
         </p:txBody>
@@ -2147,37 +2165,42 @@
           </a:p>
           <a:p>
             <a:r>
-              <a:t>What it does not do, said before anyone asks.</a:t>
-            </a:r>
-          </a:p>
-          <a:p>
-            <a:r>
-              <a:t>Static loading only, so no fatigue and no stress concentration factors. Nominal dimensions only,</a:t>
-            </a:r>
-          </a:p>
-          <a:p>
-            <a:r>
-              <a:t>so no tolerances or fits, which means the sheet is not yet a manufacturing drawing. Two of the</a:t>
-            </a:r>
-          </a:p>
-          <a:p>
-            <a:r>
-              <a:t>six joints have proportions with no book behind them, and the software says so every run. Nut</a:t>
-            </a:r>
-          </a:p>
-          <a:p>
-            <a:r>
-              <a:t>thread stripping is not checked.</a:t>
-            </a:r>
-          </a:p>
-          <a:p>
-            <a:r>
-              <a:t>Future scope: riveted and welded joints follow the same pattern, then fatigue, then tolerances</a:t>
-            </a:r>
-          </a:p>
-          <a:p>
-            <a:r>
-              <a:t>and fits, then a journal script so the assembly builds inside NX rather than being imported.</a:t>
+              <a:t>290 automated tests run on every change: the arithmetic, the geometry, the parsing, the drawing</a:t>
+            </a:r>
+          </a:p>
+          <a:p>
+            <a:r>
+              <a:t>and the analysis.</a:t>
+            </a:r>
+          </a:p>
+          <a:p>
+            <a:r>
+              <a:t>The row that matters most is the last one. There are tests that assert the three errors in the</a:t>
+            </a:r>
+          </a:p>
+          <a:p>
+            <a:r>
+              <a:t>books are real. Without them, someone could later correct our software back to the printed</a:t>
+            </a:r>
+          </a:p>
+          <a:p>
+            <a:r>
+              <a:t>answers and every other test would still pass.</a:t>
+            </a:r>
+          </a:p>
+          <a:p>
+            <a:r>
+              <a:t>One test found something no dimension check could: comparing the solids pairwise caught a gib</a:t>
+            </a:r>
+          </a:p>
+          <a:p>
+            <a:r>
+              <a:t>hook modelled 1.25 millimetres inside the strap, occupying metal another part already occupied,</a:t>
+            </a:r>
+          </a:p>
+          <a:p>
+            <a:r>
+              <a:t>while every individual dimension was correct.</a:t>
             </a:r>
           </a:p>
         </p:txBody>
@@ -2203,6 +2226,351 @@
 </file>
 
 <file path=ppt/notesSlides/notesSlide26.xml><?xml version="1.0" encoding="utf-8"?>
+<p:notes xmlns:a="http://schemas.openxmlformats.org/drawingml/2006/main" xmlns:p="http://schemas.openxmlformats.org/presentationml/2006/main" xmlns:r="http://schemas.openxmlformats.org/officeDocument/2006/relationships">
+  <p:cSld>
+    <p:spTree>
+      <p:nvGrpSpPr>
+        <p:cNvPr id="1" name=""/>
+        <p:cNvGrpSpPr/>
+        <p:nvPr/>
+      </p:nvGrpSpPr>
+      <p:grpSpPr>
+        <a:xfrm>
+          <a:off x="0" y="0"/>
+          <a:ext cx="0" cy="0"/>
+          <a:chOff x="0" y="0"/>
+          <a:chExt cx="0" cy="0"/>
+        </a:xfrm>
+      </p:grpSpPr>
+      <p:sp>
+        <p:nvSpPr>
+          <p:cNvPr id="2" name="Slide Image Placeholder 1"/>
+          <p:cNvSpPr>
+            <a:spLocks noGrp="1"/>
+          </p:cNvSpPr>
+          <p:nvPr>
+            <p:ph type="sldImg" idx="2"/>
+          </p:nvPr>
+        </p:nvSpPr>
+        <p:spPr/>
+      </p:sp>
+      <p:sp>
+        <p:nvSpPr>
+          <p:cNvPr id="3" name="Notes Placeholder 2"/>
+          <p:cNvSpPr>
+            <a:spLocks noGrp="1"/>
+          </p:cNvSpPr>
+          <p:nvPr>
+            <p:ph type="body" idx="3" sz="quarter"/>
+          </p:nvPr>
+        </p:nvSpPr>
+        <p:spPr/>
+        <p:txBody>
+          <a:bodyPr/>
+          <a:lstStyle/>
+          <a:p>
+            <a:r>
+              <a:t>ANKUR.</a:t>
+            </a:r>
+          </a:p>
+          <a:p>
+            <a:r>
+              <a:t>What it does not do, said before anyone asks.</a:t>
+            </a:r>
+          </a:p>
+          <a:p>
+            <a:r>
+              <a:t>Static loading only, so no fatigue and no stress concentration factors. Nominal dimensions only,</a:t>
+            </a:r>
+          </a:p>
+          <a:p>
+            <a:r>
+              <a:t>so no tolerances or fits, which means the sheet is not yet a manufacturing drawing. Two of the</a:t>
+            </a:r>
+          </a:p>
+          <a:p>
+            <a:r>
+              <a:t>six joints have proportions with no book behind them, and the software says so every run. Nut</a:t>
+            </a:r>
+          </a:p>
+          <a:p>
+            <a:r>
+              <a:t>thread stripping is not checked.</a:t>
+            </a:r>
+          </a:p>
+          <a:p>
+            <a:r>
+              <a:t>Future scope: riveted and welded joints follow the same pattern, then fatigue, then tolerances</a:t>
+            </a:r>
+          </a:p>
+          <a:p>
+            <a:r>
+              <a:t>and fits, then a journal script so the assembly builds inside NX rather than being imported.</a:t>
+            </a:r>
+          </a:p>
+        </p:txBody>
+      </p:sp>
+      <p:sp>
+        <p:nvSpPr>
+          <p:cNvPr id="4" name="Slide Number Placeholder 3"/>
+          <p:cNvSpPr>
+            <a:spLocks noGrp="1"/>
+          </p:cNvSpPr>
+          <p:nvPr>
+            <p:ph type="sldNum" idx="5" sz="quarter"/>
+          </p:nvPr>
+        </p:nvSpPr>
+        <p:spPr/>
+      </p:sp>
+    </p:spTree>
+  </p:cSld>
+  <p:clrMapOvr>
+    <a:masterClrMapping/>
+  </p:clrMapOvr>
+</p:notes>
+</file>
+
+<file path=ppt/notesSlides/notesSlide27.xml><?xml version="1.0" encoding="utf-8"?>
+<p:notes xmlns:a="http://schemas.openxmlformats.org/drawingml/2006/main" xmlns:p="http://schemas.openxmlformats.org/presentationml/2006/main" xmlns:r="http://schemas.openxmlformats.org/officeDocument/2006/relationships">
+  <p:cSld>
+    <p:spTree>
+      <p:nvGrpSpPr>
+        <p:cNvPr id="1" name=""/>
+        <p:cNvGrpSpPr/>
+        <p:nvPr/>
+      </p:nvGrpSpPr>
+      <p:grpSpPr>
+        <a:xfrm>
+          <a:off x="0" y="0"/>
+          <a:ext cx="0" cy="0"/>
+          <a:chOff x="0" y="0"/>
+          <a:chExt cx="0" cy="0"/>
+        </a:xfrm>
+      </p:grpSpPr>
+      <p:sp>
+        <p:nvSpPr>
+          <p:cNvPr id="2" name="Slide Image Placeholder 1"/>
+          <p:cNvSpPr>
+            <a:spLocks noGrp="1"/>
+          </p:cNvSpPr>
+          <p:nvPr>
+            <p:ph type="sldImg" idx="2"/>
+          </p:nvPr>
+        </p:nvSpPr>
+        <p:spPr/>
+      </p:sp>
+      <p:sp>
+        <p:nvSpPr>
+          <p:cNvPr id="3" name="Notes Placeholder 2"/>
+          <p:cNvSpPr>
+            <a:spLocks noGrp="1"/>
+          </p:cNvSpPr>
+          <p:nvPr>
+            <p:ph type="body" idx="3" sz="quarter"/>
+          </p:nvPr>
+        </p:nvSpPr>
+        <p:spPr/>
+        <p:txBody>
+          <a:bodyPr/>
+          <a:lstStyle/>
+          <a:p>
+            <a:r>
+              <a:t>ANKUR.</a:t>
+            </a:r>
+          </a:p>
+          <a:p>
+            <a:r>
+              <a:t>Six objectives, set out at the start, each checked against the evidence rather than restated as</a:t>
+            </a:r>
+          </a:p>
+          <a:p>
+            <a:r>
+              <a:t>done.</a:t>
+            </a:r>
+          </a:p>
+          <a:p>
+            <a:r>
+              <a:t>Five of six are met without qualification: reading plain English, sizing and verifying with</a:t>
+            </a:r>
+          </a:p>
+          <a:p>
+            <a:r>
+              <a:t>iteration, the drawing sheet, verification against literature, and browser use without install.</a:t>
+            </a:r>
+          </a:p>
+          <a:p>
+            <a:r>
+              <a:t>The sixth, opening the exported file inside NX10 itself, is met in structure, AP214 schema, four</a:t>
+            </a:r>
+          </a:p>
+          <a:p>
+            <a:r>
+              <a:t>separate solids, but not yet confirmed by watching it actually open there.</a:t>
+            </a:r>
+          </a:p>
+          <a:p>
+            <a:r>
+              <a:t>If asked why show this at all instead of just claiming six for six: because recording the gap</a:t>
+            </a:r>
+          </a:p>
+          <a:p>
+            <a:r>
+              <a:t>honestly is itself part of what Objective 5 asked for. A scorecard that hides its one open item</a:t>
+            </a:r>
+          </a:p>
+          <a:p>
+            <a:r>
+              <a:t>would undercut the exact thing it is trying to demonstrate.</a:t>
+            </a:r>
+          </a:p>
+        </p:txBody>
+      </p:sp>
+      <p:sp>
+        <p:nvSpPr>
+          <p:cNvPr id="4" name="Slide Number Placeholder 3"/>
+          <p:cNvSpPr>
+            <a:spLocks noGrp="1"/>
+          </p:cNvSpPr>
+          <p:nvPr>
+            <p:ph type="sldNum" idx="5" sz="quarter"/>
+          </p:nvPr>
+        </p:nvSpPr>
+        <p:spPr/>
+      </p:sp>
+    </p:spTree>
+  </p:cSld>
+  <p:clrMapOvr>
+    <a:masterClrMapping/>
+  </p:clrMapOvr>
+</p:notes>
+</file>
+
+<file path=ppt/notesSlides/notesSlide28.xml><?xml version="1.0" encoding="utf-8"?>
+<p:notes xmlns:a="http://schemas.openxmlformats.org/drawingml/2006/main" xmlns:p="http://schemas.openxmlformats.org/presentationml/2006/main" xmlns:r="http://schemas.openxmlformats.org/officeDocument/2006/relationships">
+  <p:cSld>
+    <p:spTree>
+      <p:nvGrpSpPr>
+        <p:cNvPr id="1" name=""/>
+        <p:cNvGrpSpPr/>
+        <p:nvPr/>
+      </p:nvGrpSpPr>
+      <p:grpSpPr>
+        <a:xfrm>
+          <a:off x="0" y="0"/>
+          <a:ext cx="0" cy="0"/>
+          <a:chOff x="0" y="0"/>
+          <a:chExt cx="0" cy="0"/>
+        </a:xfrm>
+      </p:grpSpPr>
+      <p:sp>
+        <p:nvSpPr>
+          <p:cNvPr id="2" name="Slide Image Placeholder 1"/>
+          <p:cNvSpPr>
+            <a:spLocks noGrp="1"/>
+          </p:cNvSpPr>
+          <p:nvPr>
+            <p:ph type="sldImg" idx="2"/>
+          </p:nvPr>
+        </p:nvSpPr>
+        <p:spPr/>
+      </p:sp>
+      <p:sp>
+        <p:nvSpPr>
+          <p:cNvPr id="3" name="Notes Placeholder 2"/>
+          <p:cNvSpPr>
+            <a:spLocks noGrp="1"/>
+          </p:cNvSpPr>
+          <p:nvPr>
+            <p:ph type="body" idx="3" sz="quarter"/>
+          </p:nvPr>
+        </p:nvSpPr>
+        <p:spPr/>
+        <p:txBody>
+          <a:bodyPr/>
+          <a:lstStyle/>
+          <a:p>
+            <a:r>
+              <a:t>ANKUR.</a:t>
+            </a:r>
+          </a:p>
+          <a:p>
+            <a:r>
+              <a:t>The timeline.</a:t>
+            </a:r>
+          </a:p>
+          <a:p>
+            <a:r>
+              <a:t>Green is finished, amber is where we stand today, grey is what we propose for semester eight.</a:t>
+            </a:r>
+          </a:p>
+          <a:p>
+            <a:r>
+              <a:t>Everything you have seen in this presentation is in the green and amber blocks.</a:t>
+            </a:r>
+          </a:p>
+          <a:p>
+            <a:r>
+              <a:t>Phase one was the literature and the design procedure. Phase two was the sizing engine and all</a:t>
+            </a:r>
+          </a:p>
+          <a:p>
+            <a:r>
+              <a:t>six joints with their forty-four checks. Phase three, where we are now, is the solid modelling,</a:t>
+            </a:r>
+          </a:p>
+          <a:p>
+            <a:r>
+              <a:t>the drawing sheet, the verification against the three books, the finite element cross check,</a:t>
+            </a:r>
+          </a:p>
+          <a:p>
+            <a:r>
+              <a:t>the tests and the deployment.</a:t>
+            </a:r>
+          </a:p>
+          <a:p>
+            <a:r>
+              <a:t>Semester eight is a proposal taken from the limits on the previous slide, to be agreed with our</a:t>
+            </a:r>
+          </a:p>
+          <a:p>
+            <a:r>
+              <a:t>guide: riveted and welded joints, fatigue, tolerances and fits, the two proportion sets that</a:t>
+            </a:r>
+          </a:p>
+          <a:p>
+            <a:r>
+              <a:t>still have no source, an NX journal and a bill of materials.</a:t>
+            </a:r>
+          </a:p>
+          <a:p>
+            <a:r>
+              <a:t>We are not giving week-by-week dates because we have not fixed them.</a:t>
+            </a:r>
+          </a:p>
+        </p:txBody>
+      </p:sp>
+      <p:sp>
+        <p:nvSpPr>
+          <p:cNvPr id="4" name="Slide Number Placeholder 3"/>
+          <p:cNvSpPr>
+            <a:spLocks noGrp="1"/>
+          </p:cNvSpPr>
+          <p:nvPr>
+            <p:ph type="sldNum" idx="5" sz="quarter"/>
+          </p:nvPr>
+        </p:nvSpPr>
+        <p:spPr/>
+      </p:sp>
+    </p:spTree>
+  </p:cSld>
+  <p:clrMapOvr>
+    <a:masterClrMapping/>
+  </p:clrMapOvr>
+</p:notes>
+</file>
+
+<file path=ppt/notesSlides/notesSlide29.xml><?xml version="1.0" encoding="utf-8"?>
 <p:notes xmlns:a="http://schemas.openxmlformats.org/drawingml/2006/main" xmlns:p="http://schemas.openxmlformats.org/presentationml/2006/main" xmlns:r="http://schemas.openxmlformats.org/officeDocument/2006/relationships">
   <p:cSld>
     <p:spTree>
@@ -6761,6 +7129,132 @@
 </p:sld>
 </file>
 
+<file path=ppt/slides/slide27.xml><?xml version="1.0" encoding="utf-8"?>
+<p:sld xmlns:a="http://schemas.openxmlformats.org/drawingml/2006/main" xmlns:p="http://schemas.openxmlformats.org/presentationml/2006/main" xmlns:r="http://schemas.openxmlformats.org/officeDocument/2006/relationships">
+  <p:cSld>
+    <p:spTree>
+      <p:nvGrpSpPr>
+        <p:cNvPr id="1" name=""/>
+        <p:cNvGrpSpPr/>
+        <p:nvPr/>
+      </p:nvGrpSpPr>
+      <p:grpSpPr/>
+      <p:pic>
+        <p:nvPicPr>
+          <p:cNvPr id="2" name="Picture 1" descr="s-27.png"/>
+          <p:cNvPicPr>
+            <a:picLocks noChangeAspect="1"/>
+          </p:cNvPicPr>
+          <p:nvPr/>
+        </p:nvPicPr>
+        <p:blipFill>
+          <a:blip r:embed="rId2"/>
+          <a:stretch>
+            <a:fillRect/>
+          </a:stretch>
+        </p:blipFill>
+        <p:spPr>
+          <a:xfrm>
+            <a:off x="0" y="0"/>
+            <a:ext cx="12191695" cy="6858000"/>
+          </a:xfrm>
+          <a:prstGeom prst="rect">
+            <a:avLst/>
+          </a:prstGeom>
+        </p:spPr>
+      </p:pic>
+    </p:spTree>
+  </p:cSld>
+  <p:clrMapOvr>
+    <a:masterClrMapping/>
+  </p:clrMapOvr>
+</p:sld>
+</file>
+
+<file path=ppt/slides/slide28.xml><?xml version="1.0" encoding="utf-8"?>
+<p:sld xmlns:a="http://schemas.openxmlformats.org/drawingml/2006/main" xmlns:p="http://schemas.openxmlformats.org/presentationml/2006/main" xmlns:r="http://schemas.openxmlformats.org/officeDocument/2006/relationships">
+  <p:cSld>
+    <p:spTree>
+      <p:nvGrpSpPr>
+        <p:cNvPr id="1" name=""/>
+        <p:cNvGrpSpPr/>
+        <p:nvPr/>
+      </p:nvGrpSpPr>
+      <p:grpSpPr/>
+      <p:pic>
+        <p:nvPicPr>
+          <p:cNvPr id="2" name="Picture 1" descr="s-28.png"/>
+          <p:cNvPicPr>
+            <a:picLocks noChangeAspect="1"/>
+          </p:cNvPicPr>
+          <p:nvPr/>
+        </p:nvPicPr>
+        <p:blipFill>
+          <a:blip r:embed="rId2"/>
+          <a:stretch>
+            <a:fillRect/>
+          </a:stretch>
+        </p:blipFill>
+        <p:spPr>
+          <a:xfrm>
+            <a:off x="0" y="0"/>
+            <a:ext cx="12191695" cy="6858000"/>
+          </a:xfrm>
+          <a:prstGeom prst="rect">
+            <a:avLst/>
+          </a:prstGeom>
+        </p:spPr>
+      </p:pic>
+    </p:spTree>
+  </p:cSld>
+  <p:clrMapOvr>
+    <a:masterClrMapping/>
+  </p:clrMapOvr>
+</p:sld>
+</file>
+
+<file path=ppt/slides/slide29.xml><?xml version="1.0" encoding="utf-8"?>
+<p:sld xmlns:a="http://schemas.openxmlformats.org/drawingml/2006/main" xmlns:p="http://schemas.openxmlformats.org/presentationml/2006/main" xmlns:r="http://schemas.openxmlformats.org/officeDocument/2006/relationships">
+  <p:cSld>
+    <p:spTree>
+      <p:nvGrpSpPr>
+        <p:cNvPr id="1" name=""/>
+        <p:cNvGrpSpPr/>
+        <p:nvPr/>
+      </p:nvGrpSpPr>
+      <p:grpSpPr/>
+      <p:pic>
+        <p:nvPicPr>
+          <p:cNvPr id="2" name="Picture 1" descr="s-29.png"/>
+          <p:cNvPicPr>
+            <a:picLocks noChangeAspect="1"/>
+          </p:cNvPicPr>
+          <p:nvPr/>
+        </p:nvPicPr>
+        <p:blipFill>
+          <a:blip r:embed="rId2"/>
+          <a:stretch>
+            <a:fillRect/>
+          </a:stretch>
+        </p:blipFill>
+        <p:spPr>
+          <a:xfrm>
+            <a:off x="0" y="0"/>
+            <a:ext cx="12191695" cy="6858000"/>
+          </a:xfrm>
+          <a:prstGeom prst="rect">
+            <a:avLst/>
+          </a:prstGeom>
+        </p:spPr>
+      </p:pic>
+    </p:spTree>
+  </p:cSld>
+  <p:clrMapOvr>
+    <a:masterClrMapping/>
+  </p:clrMapOvr>
+</p:sld>
+</file>
+
 <file path=ppt/slides/slide3.xml><?xml version="1.0" encoding="utf-8"?>
 <p:sld xmlns:a="http://schemas.openxmlformats.org/drawingml/2006/main" xmlns:p="http://schemas.openxmlformats.org/presentationml/2006/main" xmlns:r="http://schemas.openxmlformats.org/officeDocument/2006/relationships">
   <p:cSld>

--- a/report/AI-in-CAD-Major-Project-Presentation.pptx
+++ b/report/AI-in-CAD-Major-Project-Presentation.pptx
@@ -34,6 +34,7 @@
     <p:sldId id="282" r:id="rId34"/>
     <p:sldId id="283" r:id="rId35"/>
     <p:sldId id="284" r:id="rId36"/>
+    <p:sldId id="285" r:id="rId37"/>
   </p:sldIdLst>
   <p:sldSz cx="12191695" cy="6858000" type="screen4x3"/>
   <p:notesSz cx="6858000" cy="9144000"/>
@@ -825,7 +826,7 @@
           </a:p>
           <a:p>
             <a:r>
-              <a:t>The pin is sized twice. Double shear asks for 25.75. Bending asks for 43.72. We take the larger,</a:t>
+              <a:t>The pin is sized twice. Double shear asks for 25.75. Bending asks for 43.95. We take the larger,</a:t>
             </a:r>
           </a:p>
           <a:p>
@@ -1890,7 +1891,7 @@
           </a:p>
           <a:p>
             <a:r>
-              <a:t>The page refutes itself, and it is out by a factor of ten.</a:t>
+              <a:t>The page refutes itself, and it is out by a factor of one hundred.</a:t>
             </a:r>
           </a:p>
           <a:p>
@@ -2285,7 +2286,7 @@
           </a:p>
           <a:p>
             <a:r>
-              <a:t>so no tolerances or fits, which means the sheet is not yet a manufacturing drawing. Two of the</a:t>
+              <a:t>so no tolerances or fits, which means the sheet is not yet a manufacturing drawing. Three of the</a:t>
             </a:r>
           </a:p>
           <a:p>
@@ -2390,32 +2391,32 @@
           </a:p>
           <a:p>
             <a:r>
-              <a:t>Five of six are met without qualification: reading plain English, sizing and verifying with</a:t>
-            </a:r>
-          </a:p>
-          <a:p>
-            <a:r>
-              <a:t>iteration, the drawing sheet, verification against literature, and browser use without install.</a:t>
-            </a:r>
-          </a:p>
-          <a:p>
-            <a:r>
-              <a:t>The sixth, opening the exported file inside NX10 itself, is met in structure, AP214 schema, four</a:t>
-            </a:r>
-          </a:p>
-          <a:p>
-            <a:r>
-              <a:t>separate solids, but not yet confirmed by watching it actually open there.</a:t>
-            </a:r>
-          </a:p>
-          <a:p>
-            <a:r>
-              <a:t>If asked why show this at all instead of just claiming six for six: because recording the gap</a:t>
-            </a:r>
-          </a:p>
-          <a:p>
-            <a:r>
-              <a:t>honestly is itself part of what Objective 5 asked for. A scorecard that hides its one open item</a:t>
+              <a:t>Three are met without qualification: reading plain English, sizing and verifying with</a:t>
+            </a:r>
+          </a:p>
+          <a:p>
+            <a:r>
+              <a:t>iteration, and browser use without install. Three are met in part: the NX10 import is right in</a:t>
+            </a:r>
+          </a:p>
+          <a:p>
+            <a:r>
+              <a:t>structure, AP214 with each part its own solid, but not yet watched opening in the lab; the sheet</a:t>
+            </a:r>
+          </a:p>
+          <a:p>
+            <a:r>
+              <a:t>has projection and layout but no tolerances; and two joints are only partly verified.</a:t>
+            </a:r>
+          </a:p>
+          <a:p>
+            <a:r>
+              <a:t>If asked why show this at all instead of just claiming six for six: because recording the gaps</a:t>
+            </a:r>
+          </a:p>
+          <a:p>
+            <a:r>
+              <a:t>honestly is itself part of what Objective 5 asked for. A scorecard that hides its open items</a:t>
             </a:r>
           </a:p>
           <a:p>
@@ -2615,42 +2616,37 @@
           <a:lstStyle/>
           <a:p>
             <a:r>
-              <a:t>ANKUR.</a:t>
-            </a:r>
-          </a:p>
-          <a:p>
-            <a:r>
-              <a:t>To close.</a:t>
-            </a:r>
-          </a:p>
-          <a:p>
-            <a:r>
-              <a:t>Every dimension this software produces can be traced to a formula, and every formula to a page</a:t>
-            </a:r>
-          </a:p>
-          <a:p>
-            <a:r>
-              <a:t>in a book. That is the difference between a tool that designs and one that only draws.</a:t>
-            </a:r>
-          </a:p>
-          <a:p>
-            <a:r>
-              <a:t>The language model reads the requirement. The engineering stays deterministic, checked, and open</a:t>
-            </a:r>
-          </a:p>
-          <a:p>
-            <a:r>
-              <a:t>to inspection.</a:t>
-            </a:r>
-          </a:p>
-          <a:p>
-            <a:r>
-              <a:t>Six joints, 44 checks, 290 tests, and three errors found in published literature along the way.</a:t>
-            </a:r>
-          </a:p>
-          <a:p>
-            <a:r>
-              <a:t>Thank you. We are happy to take questions.</a:t>
+              <a:t>ATISHAY.</a:t>
+            </a:r>
+          </a:p>
+          <a:p>
+            <a:r>
+              <a:t>If you are asked whether this is a PINN, or where the AI is, use this slide.</a:t>
+            </a:r>
+          </a:p>
+          <a:p>
+            <a:r>
+              <a:t>Say: the language model reads the sentence and nothing else. Every dimension comes from the</a:t>
+            </a:r>
+          </a:p>
+          <a:p>
+            <a:r>
+              <a:t>mechanics equations on the screen, and every one of the nine failure modes is checked.</a:t>
+            </a:r>
+          </a:p>
+          <a:p>
+            <a:r>
+              <a:t>A PINN is a neural network that gets penalised when it breaks physics, so it is usually right.</a:t>
+            </a:r>
+          </a:p>
+          <a:p>
+            <a:r>
+              <a:t>Here physics is not a penalty, it is the calculation, so it cannot be wrong in that way.</a:t>
+            </a:r>
+          </a:p>
+          <a:p>
+            <a:r>
+              <a:t>If a check fails, the part grows a millimetre and every check runs again.</a:t>
             </a:r>
           </a:p>
         </p:txBody>
@@ -2761,6 +2757,111 @@
           <a:p>
             <a:r>
               <a:t>Our aim: keep every formula exactly as the textbook has it, and remove only the repetition.</a:t>
+            </a:r>
+          </a:p>
+        </p:txBody>
+      </p:sp>
+      <p:sp>
+        <p:nvSpPr>
+          <p:cNvPr id="4" name="Slide Number Placeholder 3"/>
+          <p:cNvSpPr>
+            <a:spLocks noGrp="1"/>
+          </p:cNvSpPr>
+          <p:nvPr>
+            <p:ph type="sldNum" idx="5" sz="quarter"/>
+          </p:nvPr>
+        </p:nvSpPr>
+        <p:spPr/>
+      </p:sp>
+    </p:spTree>
+  </p:cSld>
+  <p:clrMapOvr>
+    <a:masterClrMapping/>
+  </p:clrMapOvr>
+</p:notes>
+</file>
+
+<file path=ppt/notesSlides/notesSlide30.xml><?xml version="1.0" encoding="utf-8"?>
+<p:notes xmlns:a="http://schemas.openxmlformats.org/drawingml/2006/main" xmlns:p="http://schemas.openxmlformats.org/presentationml/2006/main" xmlns:r="http://schemas.openxmlformats.org/officeDocument/2006/relationships">
+  <p:cSld>
+    <p:spTree>
+      <p:nvGrpSpPr>
+        <p:cNvPr id="1" name=""/>
+        <p:cNvGrpSpPr/>
+        <p:nvPr/>
+      </p:nvGrpSpPr>
+      <p:grpSpPr>
+        <a:xfrm>
+          <a:off x="0" y="0"/>
+          <a:ext cx="0" cy="0"/>
+          <a:chOff x="0" y="0"/>
+          <a:chExt cx="0" cy="0"/>
+        </a:xfrm>
+      </p:grpSpPr>
+      <p:sp>
+        <p:nvSpPr>
+          <p:cNvPr id="2" name="Slide Image Placeholder 1"/>
+          <p:cNvSpPr>
+            <a:spLocks noGrp="1"/>
+          </p:cNvSpPr>
+          <p:nvPr>
+            <p:ph type="sldImg" idx="2"/>
+          </p:nvPr>
+        </p:nvSpPr>
+        <p:spPr/>
+      </p:sp>
+      <p:sp>
+        <p:nvSpPr>
+          <p:cNvPr id="3" name="Notes Placeholder 2"/>
+          <p:cNvSpPr>
+            <a:spLocks noGrp="1"/>
+          </p:cNvSpPr>
+          <p:nvPr>
+            <p:ph type="body" idx="3" sz="quarter"/>
+          </p:nvPr>
+        </p:nvSpPr>
+        <p:spPr/>
+        <p:txBody>
+          <a:bodyPr/>
+          <a:lstStyle/>
+          <a:p>
+            <a:r>
+              <a:t>ANKUR.</a:t>
+            </a:r>
+          </a:p>
+          <a:p>
+            <a:r>
+              <a:t>To close.</a:t>
+            </a:r>
+          </a:p>
+          <a:p>
+            <a:r>
+              <a:t>Every dimension this software produces can be traced to a formula, and every formula to a page</a:t>
+            </a:r>
+          </a:p>
+          <a:p>
+            <a:r>
+              <a:t>in a book. That is the difference between a tool that designs and one that only draws.</a:t>
+            </a:r>
+          </a:p>
+          <a:p>
+            <a:r>
+              <a:t>The language model reads the requirement. The engineering stays deterministic, checked, and open</a:t>
+            </a:r>
+          </a:p>
+          <a:p>
+            <a:r>
+              <a:t>to inspection.</a:t>
+            </a:r>
+          </a:p>
+          <a:p>
+            <a:r>
+              <a:t>Six joints, 44 checks, 290 tests, and three errors found in published literature along the way.</a:t>
+            </a:r>
+          </a:p>
+          <a:p>
+            <a:r>
+              <a:t>Thank you. We are happy to take questions.</a:t>
             </a:r>
           </a:p>
         </p:txBody>
@@ -7297,6 +7398,48 @@
 </p:sld>
 </file>
 
+<file path=ppt/slides/slide30.xml><?xml version="1.0" encoding="utf-8"?>
+<p:sld xmlns:a="http://schemas.openxmlformats.org/drawingml/2006/main" xmlns:p="http://schemas.openxmlformats.org/presentationml/2006/main" xmlns:r="http://schemas.openxmlformats.org/officeDocument/2006/relationships">
+  <p:cSld>
+    <p:spTree>
+      <p:nvGrpSpPr>
+        <p:cNvPr id="1" name=""/>
+        <p:cNvGrpSpPr/>
+        <p:nvPr/>
+      </p:nvGrpSpPr>
+      <p:grpSpPr/>
+      <p:pic>
+        <p:nvPicPr>
+          <p:cNvPr id="2" name="Picture 1" descr="s-30.png"/>
+          <p:cNvPicPr>
+            <a:picLocks noChangeAspect="1"/>
+          </p:cNvPicPr>
+          <p:nvPr/>
+        </p:nvPicPr>
+        <p:blipFill>
+          <a:blip r:embed="rId2"/>
+          <a:stretch>
+            <a:fillRect/>
+          </a:stretch>
+        </p:blipFill>
+        <p:spPr>
+          <a:xfrm>
+            <a:off x="0" y="0"/>
+            <a:ext cx="12191695" cy="6858000"/>
+          </a:xfrm>
+          <a:prstGeom prst="rect">
+            <a:avLst/>
+          </a:prstGeom>
+        </p:spPr>
+      </p:pic>
+    </p:spTree>
+  </p:cSld>
+  <p:clrMapOvr>
+    <a:masterClrMapping/>
+  </p:clrMapOvr>
+</p:sld>
+</file>
+
 <file path=ppt/slides/slide4.xml><?xml version="1.0" encoding="utf-8"?>
 <p:sld xmlns:a="http://schemas.openxmlformats.org/drawingml/2006/main" xmlns:p="http://schemas.openxmlformats.org/presentationml/2006/main" xmlns:r="http://schemas.openxmlformats.org/officeDocument/2006/relationships">
   <p:cSld>

--- a/report/AI-in-CAD-Major-Project-Presentation.pptx
+++ b/report/AI-in-CAD-Major-Project-Presentation.pptx
@@ -2061,7 +2061,7 @@
           </a:p>
           <a:p>
             <a:r>
-              <a:t>On the knuckle eye rod: formula 52.0, computed 57.9, about 11.5 percent higher. That is expected,</a:t>
+              <a:t>On the knuckle eye rod: formula 52.0, computed 57.9, about 11.3 percent higher. That is expected,</a:t>
             </a:r>
           </a:p>
           <a:p>
@@ -2166,7 +2166,7 @@
           </a:p>
           <a:p>
             <a:r>
-              <a:t>290 automated tests run on every change: the arithmetic, the geometry, the parsing, the drawing</a:t>
+              <a:t>296 automated tests run on every change: the arithmetic, the geometry, the parsing, the drawing</a:t>
             </a:r>
           </a:p>
           <a:p>
@@ -2856,7 +2856,7 @@
           </a:p>
           <a:p>
             <a:r>
-              <a:t>Six joints, 44 checks, 290 tests, and three errors found in published literature along the way.</a:t>
+              <a:t>Six joints, 44 checks, 296 tests, and three errors found in published literature along the way.</a:t>
             </a:r>
           </a:p>
           <a:p>

--- a/report/AI-in-CAD-Major-Project-Presentation.pptx
+++ b/report/AI-in-CAD-Major-Project-Presentation.pptx
@@ -646,7 +646,7 @@
           </a:p>
           <a:p>
             <a:r>
-              <a:t>The busiest check across all six sits between 67 and 79 percent of allowable. That is</a:t>
+              <a:t>The busiest check across all six sits between 71 and 79 percent of allowable. That is</a:t>
             </a:r>
           </a:p>
           <a:p>
@@ -826,7 +826,7 @@
           </a:p>
           <a:p>
             <a:r>
-              <a:t>The pin is sized twice. Double shear asks for 25.75. Bending asks for 43.95. We take the larger,</a:t>
+              <a:t>The pin is sized twice. Double shear asks for 25.75. Bending asks for 44.85. We take the larger,</a:t>
             </a:r>
           </a:p>
           <a:p>
@@ -931,7 +931,7 @@
           </a:p>
           <a:p>
             <a:r>
-              <a:t>Nine of nine are satisfied. The busiest is shear of the eye at 76 percent of its allowable.</a:t>
+              <a:t>Nine of nine are satisfied. The busiest is the pin in bending at 79 percent of its allowable.</a:t>
             </a:r>
           </a:p>
           <a:p>
